--- a/MECH151_techDesign/MECH151_Unit_Reference_Deck.pptx
+++ b/MECH151_techDesign/MECH151_Unit_Reference_Deck.pptx
@@ -46768,171 +46768,18 @@
       </p:sp>
       <p:sp>
         <p:nvSpPr>
-          <p:cNvPr id="7" name="Text 5"/>
-          <p:cNvSpPr txBox="1"/>
+          <p:cNvPr id="7" name="Shape 5"/>
+          <p:cNvSpPr/>
           <p:nvPr/>
         </p:nvSpPr>
         <p:spPr>
           <a:xfrm>
             <a:off x="502920" y="1783080"/>
-            <a:ext cx="5440680" cy="685800"/>
-          </a:xfrm>
-          <a:prstGeom prst="rect">
-            <a:avLst/>
-          </a:prstGeom>
-          <a:noFill/>
-          <a:ln/>
-        </p:spPr>
-        <p:txBody>
-          <a:bodyPr wrap="square" lIns="0" tIns="0" rIns="0" bIns="0" rtlCol="0" anchor="t"/>
-          <a:lstStyle/>
-          <a:p>
-            <a:pPr marL="342900" indent="-342900">
-              <a:buSzPct val="100000"/>
-              <a:buChar char="●"/>
-            </a:pPr>
-            <a:r>
-              <a:rPr lang="en-US" sz="1150" b="1" dirty="0">
-                <a:solidFill>
-                  <a:srgbClr val="0F2942"/>
-                </a:solidFill>
-                <a:latin typeface="Calibri" pitchFamily="34" charset="0"/>
-                <a:ea typeface="Calibri" pitchFamily="34" charset="-122"/>
-                <a:cs typeface="Calibri" pitchFamily="34" charset="-120"/>
-              </a:rPr>
-              <a:t>Machines — </a:t>
-            </a:r>
-            <a:pPr indent="0" marL="0">
-              <a:spcAft>
-                <a:spcPts val="800"/>
-              </a:spcAft>
-              <a:buNone/>
-            </a:pPr>
-            <a:r>
-              <a:rPr lang="en-US" sz="1150" dirty="0">
-                <a:solidFill>
-                  <a:srgbClr val="44536B"/>
-                </a:solidFill>
-                <a:latin typeface="Calibri" pitchFamily="34" charset="0"/>
-                <a:ea typeface="Calibri" pitchFamily="34" charset="-122"/>
-                <a:cs typeface="Calibri" pitchFamily="34" charset="-120"/>
-              </a:rPr>
-              <a:t>mills, lathes, and routers — what each is shaped to produce</a:t>
-            </a:r>
-            <a:endParaRPr lang="en-US" sz="1150" dirty="0"/>
-          </a:p>
-        </p:txBody>
-      </p:sp>
-      <p:sp>
-        <p:nvSpPr>
-          <p:cNvPr id="8" name="Text 6"/>
-          <p:cNvSpPr txBox="1"/>
-          <p:nvPr/>
-        </p:nvSpPr>
-        <p:spPr>
-          <a:xfrm>
-            <a:off x="6172200" y="1783080"/>
-            <a:ext cx="5532120" cy="685800"/>
-          </a:xfrm>
-          <a:prstGeom prst="rect">
-            <a:avLst/>
-          </a:prstGeom>
-          <a:noFill/>
-          <a:ln/>
-        </p:spPr>
-        <p:txBody>
-          <a:bodyPr wrap="square" lIns="0" tIns="0" rIns="0" bIns="0" rtlCol="0" anchor="t"/>
-          <a:lstStyle/>
-          <a:p>
-            <a:pPr marL="342900" indent="-342900">
-              <a:buSzPct val="100000"/>
-              <a:buChar char="●"/>
-            </a:pPr>
-            <a:r>
-              <a:rPr lang="en-US" sz="1150" b="1" dirty="0">
-                <a:solidFill>
-                  <a:srgbClr val="0F2942"/>
-                </a:solidFill>
-                <a:latin typeface="Calibri" pitchFamily="34" charset="0"/>
-                <a:ea typeface="Calibri" pitchFamily="34" charset="-122"/>
-                <a:cs typeface="Calibri" pitchFamily="34" charset="-120"/>
-              </a:rPr>
-              <a:t>Workholding — </a:t>
-            </a:r>
-            <a:pPr indent="0" marL="0">
-              <a:spcAft>
-                <a:spcPts val="800"/>
-              </a:spcAft>
-              <a:buNone/>
-            </a:pPr>
-            <a:r>
-              <a:rPr lang="en-US" sz="1150" dirty="0">
-                <a:solidFill>
-                  <a:srgbClr val="44536B"/>
-                </a:solidFill>
-                <a:latin typeface="Calibri" pitchFamily="34" charset="0"/>
-                <a:ea typeface="Calibri" pitchFamily="34" charset="-122"/>
-                <a:cs typeface="Calibri" pitchFamily="34" charset="-120"/>
-              </a:rPr>
-              <a:t>vises, clamps, fixtures — the part must be held rigidly and the tool must reach</a:t>
-            </a:r>
-            <a:endParaRPr lang="en-US" sz="1150" dirty="0"/>
-          </a:p>
-        </p:txBody>
-      </p:sp>
-      <p:sp>
-        <p:nvSpPr>
-          <p:cNvPr id="9" name="Text 7"/>
-          <p:cNvSpPr txBox="1"/>
-          <p:nvPr/>
-        </p:nvSpPr>
-        <p:spPr>
-          <a:xfrm>
-            <a:off x="502920" y="2542032"/>
-            <a:ext cx="11201400" cy="237744"/>
-          </a:xfrm>
-          <a:prstGeom prst="rect">
-            <a:avLst/>
-          </a:prstGeom>
-          <a:noFill/>
-          <a:ln/>
-        </p:spPr>
-        <p:txBody>
-          <a:bodyPr wrap="square" lIns="0" tIns="0" rIns="0" bIns="0" rtlCol="0" anchor="ctr"/>
-          <a:lstStyle/>
-          <a:p>
-            <a:pPr indent="0" marL="0">
-              <a:buNone/>
-            </a:pPr>
-            <a:r>
-              <a:rPr lang="en-US" sz="1150" b="1" i="1" dirty="0">
-                <a:solidFill>
-                  <a:srgbClr val="8592A3"/>
-                </a:solidFill>
-                <a:latin typeface="Calibri" pitchFamily="34" charset="0"/>
-                <a:ea typeface="Calibri" pitchFamily="34" charset="-122"/>
-                <a:cs typeface="Calibri" pitchFamily="34" charset="-120"/>
-              </a:rPr>
-              <a:t>Tool Access &amp; Geometry</a:t>
-            </a:r>
-            <a:endParaRPr lang="en-US" sz="1150" dirty="0"/>
-          </a:p>
-        </p:txBody>
-      </p:sp>
-      <p:sp>
-        <p:nvSpPr>
-          <p:cNvPr id="10" name="Shape 8"/>
-          <p:cNvSpPr/>
-          <p:nvPr/>
-        </p:nvSpPr>
-        <p:spPr>
-          <a:xfrm>
-            <a:off x="502920" y="2798064"/>
-            <a:ext cx="5486400" cy="1874520"/>
+            <a:ext cx="3581400" cy="2606040"/>
           </a:xfrm>
           <a:prstGeom prst="roundRect">
             <a:avLst>
-              <a:gd name="adj" fmla="val 3415"/>
+              <a:gd name="adj" fmla="val 2456"/>
             </a:avLst>
           </a:prstGeom>
           <a:solidFill>
@@ -46948,7 +46795,7 @@
       </p:sp>
       <p:pic>
         <p:nvPicPr>
-          <p:cNvPr id="11" name="Image 0" descr="/tmp/mech151_deck/images/35_tool_corner.png">    </p:cNvPr>
+          <p:cNvPr id="8" name="Image 0" descr="/tmp/mech151_deck/images/38_workholding.png">    </p:cNvPr>
           <p:cNvPicPr>
             <a:picLocks noChangeAspect="1"/>
           </p:cNvPicPr>
@@ -46962,8 +46809,8 @@
         </p:blipFill>
         <p:spPr>
           <a:xfrm>
-            <a:off x="2263745" y="2866644"/>
-            <a:ext cx="1964750" cy="1737360"/>
+            <a:off x="704358" y="1851660"/>
+            <a:ext cx="3178524" cy="2468880"/>
           </a:xfrm>
           <a:prstGeom prst="rect">
             <a:avLst/>
@@ -46972,18 +46819,18 @@
       </p:pic>
       <p:sp>
         <p:nvSpPr>
-          <p:cNvPr id="12" name="Shape 9"/>
-          <p:cNvSpPr/>
-          <p:nvPr/>
-        </p:nvSpPr>
-        <p:spPr>
-          <a:xfrm>
-            <a:off x="6217920" y="2798064"/>
-            <a:ext cx="5486400" cy="1874520"/>
+          <p:cNvPr id="9" name="Shape 6"/>
+          <p:cNvSpPr/>
+          <p:nvPr/>
+        </p:nvSpPr>
+        <p:spPr>
+          <a:xfrm>
+            <a:off x="4312920" y="1783080"/>
+            <a:ext cx="3581400" cy="2606040"/>
           </a:xfrm>
           <a:prstGeom prst="roundRect">
             <a:avLst>
-              <a:gd name="adj" fmla="val 3415"/>
+              <a:gd name="adj" fmla="val 2456"/>
             </a:avLst>
           </a:prstGeom>
           <a:solidFill>
@@ -46999,7 +46846,7 @@
       </p:sp>
       <p:pic>
         <p:nvPicPr>
-          <p:cNvPr id="13" name="Image 1" descr="/tmp/mech151_deck/images/36_tool_deflection.png">    </p:cNvPr>
+          <p:cNvPr id="10" name="Image 1" descr="/tmp/mech151_deck/images/35_tool_corner.png">    </p:cNvPr>
           <p:cNvPicPr>
             <a:picLocks noChangeAspect="1"/>
           </p:cNvPicPr>
@@ -47013,8 +46860,8 @@
         </p:blipFill>
         <p:spPr>
           <a:xfrm>
-            <a:off x="7227751" y="2866644"/>
-            <a:ext cx="3466738" cy="1737360"/>
+            <a:off x="4707614" y="1851660"/>
+            <a:ext cx="2792013" cy="2468880"/>
           </a:xfrm>
           <a:prstGeom prst="rect">
             <a:avLst/>
@@ -47023,57 +46870,18 @@
       </p:pic>
       <p:sp>
         <p:nvSpPr>
-          <p:cNvPr id="14" name="Text 10"/>
-          <p:cNvSpPr txBox="1"/>
-          <p:nvPr/>
-        </p:nvSpPr>
-        <p:spPr>
-          <a:xfrm>
-            <a:off x="502920" y="4800600"/>
-            <a:ext cx="11201400" cy="219456"/>
-          </a:xfrm>
-          <a:prstGeom prst="rect">
-            <a:avLst/>
-          </a:prstGeom>
-          <a:noFill/>
-          <a:ln/>
-        </p:spPr>
-        <p:txBody>
-          <a:bodyPr wrap="square" lIns="0" tIns="0" rIns="0" bIns="0" rtlCol="0" anchor="ctr"/>
-          <a:lstStyle/>
-          <a:p>
-            <a:pPr indent="0" marL="0">
-              <a:buNone/>
-            </a:pPr>
-            <a:r>
-              <a:rPr lang="en-US" sz="1150" b="1" i="1" dirty="0">
-                <a:solidFill>
-                  <a:srgbClr val="8592A3"/>
-                </a:solidFill>
-                <a:latin typeface="Calibri" pitchFamily="34" charset="0"/>
-                <a:ea typeface="Calibri" pitchFamily="34" charset="-122"/>
-                <a:cs typeface="Calibri" pitchFamily="34" charset="-120"/>
-              </a:rPr>
-              <a:t>Feeds &amp; Speeds</a:t>
-            </a:r>
-            <a:endParaRPr lang="en-US" sz="1150" dirty="0"/>
-          </a:p>
-        </p:txBody>
-      </p:sp>
-      <p:sp>
-        <p:nvSpPr>
-          <p:cNvPr id="15" name="Shape 11"/>
-          <p:cNvSpPr/>
-          <p:nvPr/>
-        </p:nvSpPr>
-        <p:spPr>
-          <a:xfrm>
-            <a:off x="502920" y="5056632"/>
-            <a:ext cx="11201400" cy="1536192"/>
+          <p:cNvPr id="11" name="Shape 7"/>
+          <p:cNvSpPr/>
+          <p:nvPr/>
+        </p:nvSpPr>
+        <p:spPr>
+          <a:xfrm>
+            <a:off x="8122920" y="1783080"/>
+            <a:ext cx="3581400" cy="2606040"/>
           </a:xfrm>
           <a:prstGeom prst="roundRect">
             <a:avLst>
-              <a:gd name="adj" fmla="val 4167"/>
+              <a:gd name="adj" fmla="val 2456"/>
             </a:avLst>
           </a:prstGeom>
           <a:solidFill>
@@ -47089,7 +46897,7 @@
       </p:sp>
       <p:pic>
         <p:nvPicPr>
-          <p:cNvPr id="16" name="Image 2" descr="/tmp/mech151_deck/images/37_feeds_speeds.png">    </p:cNvPr>
+          <p:cNvPr id="12" name="Image 2" descr="/tmp/mech151_deck/images/36_tool_deflection.png">    </p:cNvPr>
           <p:cNvPicPr>
             <a:picLocks noChangeAspect="1"/>
           </p:cNvPicPr>
@@ -47103,8 +46911,98 @@
         </p:blipFill>
         <p:spPr>
           <a:xfrm>
-            <a:off x="4049330" y="5125212"/>
-            <a:ext cx="4108581" cy="1399032"/>
+            <a:off x="8581962" y="1851660"/>
+            <a:ext cx="2663316" cy="2468880"/>
+          </a:xfrm>
+          <a:prstGeom prst="rect">
+            <a:avLst/>
+          </a:prstGeom>
+        </p:spPr>
+      </p:pic>
+      <p:sp>
+        <p:nvSpPr>
+          <p:cNvPr id="13" name="Text 8"/>
+          <p:cNvSpPr txBox="1"/>
+          <p:nvPr/>
+        </p:nvSpPr>
+        <p:spPr>
+          <a:xfrm>
+            <a:off x="502920" y="4517136"/>
+            <a:ext cx="11201400" cy="219456"/>
+          </a:xfrm>
+          <a:prstGeom prst="rect">
+            <a:avLst/>
+          </a:prstGeom>
+          <a:noFill/>
+          <a:ln/>
+        </p:spPr>
+        <p:txBody>
+          <a:bodyPr wrap="square" lIns="0" tIns="0" rIns="0" bIns="0" rtlCol="0" anchor="ctr"/>
+          <a:lstStyle/>
+          <a:p>
+            <a:pPr indent="0" marL="0">
+              <a:buNone/>
+            </a:pPr>
+            <a:r>
+              <a:rPr lang="en-US" sz="1150" b="1" i="1" dirty="0">
+                <a:solidFill>
+                  <a:srgbClr val="8592A3"/>
+                </a:solidFill>
+                <a:latin typeface="Calibri" pitchFamily="34" charset="0"/>
+                <a:ea typeface="Calibri" pitchFamily="34" charset="-122"/>
+                <a:cs typeface="Calibri" pitchFamily="34" charset="-120"/>
+              </a:rPr>
+              <a:t>Feeds &amp; Speeds</a:t>
+            </a:r>
+            <a:endParaRPr lang="en-US" sz="1150" dirty="0"/>
+          </a:p>
+        </p:txBody>
+      </p:sp>
+      <p:sp>
+        <p:nvSpPr>
+          <p:cNvPr id="14" name="Shape 9"/>
+          <p:cNvSpPr/>
+          <p:nvPr/>
+        </p:nvSpPr>
+        <p:spPr>
+          <a:xfrm>
+            <a:off x="502920" y="4791456"/>
+            <a:ext cx="11201400" cy="1645920"/>
+          </a:xfrm>
+          <a:prstGeom prst="roundRect">
+            <a:avLst>
+              <a:gd name="adj" fmla="val 3889"/>
+            </a:avLst>
+          </a:prstGeom>
+          <a:solidFill>
+            <a:srgbClr val="F3F6F9"/>
+          </a:solidFill>
+          <a:ln w="12700">
+            <a:solidFill>
+              <a:srgbClr val="E1E7EE"/>
+            </a:solidFill>
+            <a:prstDash val="solid"/>
+          </a:ln>
+        </p:spPr>
+      </p:sp>
+      <p:pic>
+        <p:nvPicPr>
+          <p:cNvPr id="15" name="Image 3" descr="/tmp/mech151_deck/images/37_feeds_speeds.png">    </p:cNvPr>
+          <p:cNvPicPr>
+            <a:picLocks noChangeAspect="1"/>
+          </p:cNvPicPr>
+          <p:nvPr/>
+        </p:nvPicPr>
+        <p:blipFill>
+          <a:blip r:embed="rId4"/>
+          <a:stretch>
+            <a:fillRect/>
+          </a:stretch>
+        </p:blipFill>
+        <p:spPr>
+          <a:xfrm>
+            <a:off x="3888209" y="4860036"/>
+            <a:ext cx="4430822" cy="1508760"/>
           </a:xfrm>
           <a:prstGeom prst="rect">
             <a:avLst/>

--- a/MECH151_techDesign/MECH151_Unit_Reference_Deck.pptx
+++ b/MECH151_techDesign/MECH151_Unit_Reference_Deck.pptx
@@ -13824,8 +13824,8 @@
         </p:blipFill>
         <p:spPr>
           <a:xfrm>
-            <a:off x="1762971" y="1956816"/>
-            <a:ext cx="1079586" cy="1134039"/>
+            <a:off x="1757052" y="1956816"/>
+            <a:ext cx="1091424" cy="1134039"/>
           </a:xfrm>
           <a:prstGeom prst="rect">
             <a:avLst/>
@@ -13956,8 +13956,8 @@
         </p:blipFill>
         <p:spPr>
           <a:xfrm>
-            <a:off x="5089752" y="1956816"/>
-            <a:ext cx="2027736" cy="1134039"/>
+            <a:off x="5139147" y="1956816"/>
+            <a:ext cx="1928946" cy="1134039"/>
           </a:xfrm>
           <a:prstGeom prst="rect">
             <a:avLst/>
@@ -14088,8 +14088,8 @@
         </p:blipFill>
         <p:spPr>
           <a:xfrm>
-            <a:off x="9042220" y="1956816"/>
-            <a:ext cx="1724512" cy="1134039"/>
+            <a:off x="8840797" y="1956816"/>
+            <a:ext cx="2127358" cy="1134039"/>
           </a:xfrm>
           <a:prstGeom prst="rect">
             <a:avLst/>
@@ -14220,8 +14220,8 @@
         </p:blipFill>
         <p:spPr>
           <a:xfrm>
-            <a:off x="1186604" y="4302252"/>
-            <a:ext cx="2232320" cy="1134039"/>
+            <a:off x="1232408" y="4302252"/>
+            <a:ext cx="2140713" cy="1134039"/>
           </a:xfrm>
           <a:prstGeom prst="rect">
             <a:avLst/>
@@ -14352,8 +14352,8 @@
         </p:blipFill>
         <p:spPr>
           <a:xfrm>
-            <a:off x="4692515" y="4302252"/>
-            <a:ext cx="2822210" cy="1134039"/>
+            <a:off x="4532376" y="4353878"/>
+            <a:ext cx="3142488" cy="1030786"/>
           </a:xfrm>
           <a:prstGeom prst="rect">
             <a:avLst/>
@@ -14484,8 +14484,8 @@
         </p:blipFill>
         <p:spPr>
           <a:xfrm>
-            <a:off x="9199496" y="4302252"/>
-            <a:ext cx="1409961" cy="1134039"/>
+            <a:off x="9232606" y="4302252"/>
+            <a:ext cx="1343740" cy="1134039"/>
           </a:xfrm>
           <a:prstGeom prst="rect">
             <a:avLst/>
@@ -18754,8 +18754,8 @@
         </p:blipFill>
         <p:spPr>
           <a:xfrm>
-            <a:off x="6387084" y="5175367"/>
-            <a:ext cx="5134356" cy="859811"/>
+            <a:off x="6387084" y="5175886"/>
+            <a:ext cx="5134356" cy="858771"/>
           </a:xfrm>
           <a:prstGeom prst="rect">
             <a:avLst/>
@@ -22163,8 +22163,8 @@
         </p:blipFill>
         <p:spPr>
           <a:xfrm>
-            <a:off x="1489676" y="4654296"/>
-            <a:ext cx="3526604" cy="1143000"/>
+            <a:off x="1498232" y="4654296"/>
+            <a:ext cx="3509493" cy="1143000"/>
           </a:xfrm>
           <a:prstGeom prst="rect">
             <a:avLst/>
@@ -22295,8 +22295,8 @@
         </p:blipFill>
         <p:spPr>
           <a:xfrm>
-            <a:off x="6765253" y="4654296"/>
-            <a:ext cx="4378018" cy="1143000"/>
+            <a:off x="6811855" y="4654296"/>
+            <a:ext cx="4284814" cy="1143000"/>
           </a:xfrm>
           <a:prstGeom prst="rect">
             <a:avLst/>
@@ -22615,8 +22615,8 @@
         </p:blipFill>
         <p:spPr>
           <a:xfrm>
-            <a:off x="2699838" y="1755648"/>
-            <a:ext cx="6807563" cy="2788920"/>
+            <a:off x="2584957" y="1755648"/>
+            <a:ext cx="7037327" cy="2788920"/>
           </a:xfrm>
           <a:prstGeom prst="rect">
             <a:avLst/>
@@ -22838,8 +22838,8 @@
         </p:blipFill>
         <p:spPr>
           <a:xfrm>
-            <a:off x="7350159" y="4764024"/>
-            <a:ext cx="3208206" cy="1508760"/>
+            <a:off x="6944226" y="4764024"/>
+            <a:ext cx="4020073" cy="1508760"/>
           </a:xfrm>
           <a:prstGeom prst="rect">
             <a:avLst/>
@@ -23138,8 +23138,8 @@
         </p:blipFill>
         <p:spPr>
           <a:xfrm>
-            <a:off x="800604" y="2121408"/>
-            <a:ext cx="2970792" cy="1920240"/>
+            <a:off x="749430" y="2121408"/>
+            <a:ext cx="3073140" cy="1920240"/>
           </a:xfrm>
           <a:prstGeom prst="rect">
             <a:avLst/>
@@ -44565,7 +44565,7 @@
                 <a:ea typeface="Cambria" pitchFamily="34" charset="-122"/>
                 <a:cs typeface="Cambria" pitchFamily="34" charset="-120"/>
               </a:rPr>
-              <a:t>Additive Manufacturing (3D Printing)</a:t>
+              <a:t>Machine Safety, PPE &amp; Operation</a:t>
             </a:r>
             <a:endParaRPr lang="en-US" sz="2600" dirty="0"/>
           </a:p>
@@ -44604,7 +44604,7 @@
                 <a:ea typeface="Calibri" pitchFamily="34" charset="-122"/>
                 <a:cs typeface="Calibri" pitchFamily="34" charset="-120"/>
               </a:rPr>
-              <a:t>The course uses material-extrusion printing (FDM/FFF), building one deposited layer at a time.</a:t>
+              <a:t>Students are checked out on safe setup and operation before running any shop equipment.</a:t>
             </a:r>
             <a:endParaRPr lang="en-US" sz="1250" dirty="0"/>
           </a:p>
@@ -44657,8 +44657,8 @@
         </p:nvSpPr>
         <p:spPr>
           <a:xfrm>
-            <a:off x="502920" y="1965960"/>
-            <a:ext cx="11201400" cy="1600200"/>
+            <a:off x="502920" y="2011680"/>
+            <a:ext cx="11201400" cy="3108960"/>
           </a:xfrm>
           <a:prstGeom prst="rect">
             <a:avLst/>
@@ -44683,7 +44683,7 @@
                 <a:ea typeface="Calibri" pitchFamily="34" charset="-122"/>
                 <a:cs typeface="Calibri" pitchFamily="34" charset="-120"/>
               </a:rPr>
-              <a:t>Materials — </a:t>
+              <a:t>Baseline PPE — </a:t>
             </a:r>
             <a:pPr indent="0" marL="0">
               <a:spcAft>
@@ -44700,7 +44700,7 @@
                 <a:ea typeface="Calibri" pitchFamily="34" charset="-122"/>
                 <a:cs typeface="Calibri" pitchFamily="34" charset="-120"/>
               </a:rPr>
-              <a:t>PLA, PETG, ABS — printability, strength, and temperature trade-offs</a:t>
+              <a:t>ANSI Z87.1 safety glasses, closed-toe shoes, no loose clothing/jewelry/unrestrained hair</a:t>
             </a:r>
             <a:endParaRPr lang="en-US" sz="1250" dirty="0"/>
           </a:p>
@@ -44718,7 +44718,7 @@
                 <a:ea typeface="Calibri" pitchFamily="34" charset="-122"/>
                 <a:cs typeface="Calibri" pitchFamily="34" charset="-120"/>
               </a:rPr>
-              <a:t>Orientation — </a:t>
+              <a:t>Rotating machinery — </a:t>
             </a:r>
             <a:pPr indent="0" marL="0">
               <a:spcAft>
@@ -44735,7 +44735,7 @@
                 <a:ea typeface="Calibri" pitchFamily="34" charset="-122"/>
                 <a:cs typeface="Calibri" pitchFamily="34" charset="-120"/>
               </a:rPr>
-              <a:t>layers are weakest in the build (Z) direction — a strength decision, not just fit-on-bed</a:t>
+              <a:t>never wear gloves near a spindle, chuck, or bit — a caught glove pulls the hand in</a:t>
             </a:r>
             <a:endParaRPr lang="en-US" sz="1250" dirty="0"/>
           </a:p>
@@ -44753,7 +44753,7 @@
                 <a:ea typeface="Calibri" pitchFamily="34" charset="-122"/>
                 <a:cs typeface="Calibri" pitchFamily="34" charset="-120"/>
               </a:rPr>
-              <a:t>Supports &amp; overhangs — </a:t>
+              <a:t>Laser cutter — </a:t>
             </a:r>
             <a:pPr indent="0" marL="0">
               <a:spcAft>
@@ -44770,7 +44770,7 @@
                 <a:ea typeface="Calibri" pitchFamily="34" charset="-122"/>
                 <a:cs typeface="Calibri" pitchFamily="34" charset="-120"/>
               </a:rPr>
-              <a:t>the roughly 45° rule, bridging limits, designing to avoid support</a:t>
+              <a:t>never run unattended; keep a view of the cut; know the extraction and fire response</a:t>
             </a:r>
             <a:endParaRPr lang="en-US" sz="1250" dirty="0"/>
           </a:p>
@@ -44788,7 +44788,7 @@
                 <a:ea typeface="Calibri" pitchFamily="34" charset="-122"/>
                 <a:cs typeface="Calibri" pitchFamily="34" charset="-120"/>
               </a:rPr>
-              <a:t>Settings that matter — </a:t>
+              <a:t>3D printers — </a:t>
             </a:r>
             <a:pPr indent="0" marL="0">
               <a:spcAft>
@@ -44805,7 +44805,7 @@
                 <a:ea typeface="Calibri" pitchFamily="34" charset="-122"/>
                 <a:cs typeface="Calibri" pitchFamily="34" charset="-120"/>
               </a:rPr>
-              <a:t>layer height, wall count, infill density and pattern</a:t>
+              <a:t>hot nozzle and bed — let them cool, don't reach into an active machine</a:t>
             </a:r>
             <a:endParaRPr lang="en-US" sz="1250" dirty="0"/>
           </a:p>
@@ -44823,7 +44823,7 @@
                 <a:ea typeface="Calibri" pitchFamily="34" charset="-122"/>
                 <a:cs typeface="Calibri" pitchFamily="34" charset="-120"/>
               </a:rPr>
-              <a:t>Tolerances — </a:t>
+              <a:t>Before starting — </a:t>
             </a:r>
             <a:pPr indent="0" marL="0">
               <a:spcAft>
@@ -44840,7 +44840,7 @@
                 <a:ea typeface="Calibri" pitchFamily="34" charset="-122"/>
                 <a:cs typeface="Calibri" pitchFamily="34" charset="-120"/>
               </a:rPr>
-              <a:t>holes print undersize, first layers spread — allow for it or drill/ream after</a:t>
+              <a:t>know the location of the e-stop, fire extinguisher, and first-aid kit</a:t>
             </a:r>
             <a:endParaRPr lang="en-US" sz="1250" dirty="0"/>
           </a:p>
@@ -44848,221 +44848,77 @@
       </p:sp>
       <p:sp>
         <p:nvSpPr>
-          <p:cNvPr id="8" name="Text 6"/>
-          <p:cNvSpPr txBox="1"/>
-          <p:nvPr/>
-        </p:nvSpPr>
-        <p:spPr>
-          <a:xfrm>
-            <a:off x="502920" y="3657600"/>
-            <a:ext cx="11201400" cy="256032"/>
-          </a:xfrm>
-          <a:prstGeom prst="rect">
-            <a:avLst/>
-          </a:prstGeom>
-          <a:noFill/>
-          <a:ln/>
-        </p:spPr>
-        <p:txBody>
-          <a:bodyPr wrap="square" lIns="0" tIns="0" rIns="0" bIns="0" rtlCol="0" anchor="ctr"/>
-          <a:lstStyle/>
-          <a:p>
-            <a:pPr indent="0" marL="0">
-              <a:buNone/>
-            </a:pPr>
-            <a:r>
-              <a:rPr lang="en-US" sz="1150" b="1" i="1" dirty="0">
-                <a:solidFill>
-                  <a:srgbClr val="8592A3"/>
-                </a:solidFill>
-                <a:latin typeface="Calibri" pitchFamily="34" charset="0"/>
-                <a:ea typeface="Calibri" pitchFamily="34" charset="-122"/>
-                <a:cs typeface="Calibri" pitchFamily="34" charset="-120"/>
-              </a:rPr>
-              <a:t>Common Print Issues &amp; Fixes</a:t>
-            </a:r>
-            <a:endParaRPr lang="en-US" sz="1150" dirty="0"/>
-          </a:p>
-        </p:txBody>
-      </p:sp>
-      <p:sp>
-        <p:nvSpPr>
-          <p:cNvPr id="9" name="Shape 7"/>
-          <p:cNvSpPr/>
-          <p:nvPr/>
-        </p:nvSpPr>
-        <p:spPr>
-          <a:xfrm>
-            <a:off x="502920" y="3977640"/>
-            <a:ext cx="2628900" cy="2423160"/>
+          <p:cNvPr id="8" name="Shape 6"/>
+          <p:cNvSpPr/>
+          <p:nvPr/>
+        </p:nvSpPr>
+        <p:spPr>
+          <a:xfrm>
+            <a:off x="502920" y="5212080"/>
+            <a:ext cx="11201400" cy="777240"/>
           </a:xfrm>
           <a:prstGeom prst="roundRect">
             <a:avLst>
-              <a:gd name="adj" fmla="val 2642"/>
+              <a:gd name="adj" fmla="val 9412"/>
             </a:avLst>
           </a:prstGeom>
           <a:solidFill>
             <a:srgbClr val="F3F6F9"/>
           </a:solidFill>
-          <a:ln w="12700">
+          <a:ln w="15875">
             <a:solidFill>
-              <a:srgbClr val="E1E7EE"/>
+              <a:srgbClr val="C0392B"/>
             </a:solidFill>
             <a:prstDash val="solid"/>
           </a:ln>
         </p:spPr>
       </p:sp>
-      <p:pic>
-        <p:nvPicPr>
-          <p:cNvPr id="10" name="Image 0" descr="/tmp/mech151_deck/images/31_elephant_footing.png">    </p:cNvPr>
-          <p:cNvPicPr>
-            <a:picLocks noChangeAspect="1"/>
-          </p:cNvPicPr>
-          <p:nvPr/>
-        </p:nvPicPr>
-        <p:blipFill>
-          <a:blip r:embed="rId1"/>
-          <a:stretch>
-            <a:fillRect/>
-          </a:stretch>
-        </p:blipFill>
-        <p:spPr>
-          <a:xfrm>
-            <a:off x="1304504" y="4105656"/>
-            <a:ext cx="1025732" cy="960120"/>
-          </a:xfrm>
-          <a:prstGeom prst="rect">
-            <a:avLst/>
-          </a:prstGeom>
-        </p:spPr>
-      </p:pic>
-      <p:sp>
-        <p:nvSpPr>
-          <p:cNvPr id="11" name="Text 8"/>
-          <p:cNvSpPr txBox="1"/>
-          <p:nvPr/>
-        </p:nvSpPr>
-        <p:spPr>
-          <a:xfrm>
-            <a:off x="640080" y="5120640"/>
-            <a:ext cx="2354580" cy="237744"/>
-          </a:xfrm>
-          <a:prstGeom prst="rect">
-            <a:avLst/>
-          </a:prstGeom>
-          <a:noFill/>
-          <a:ln/>
-        </p:spPr>
-        <p:txBody>
-          <a:bodyPr wrap="square" lIns="0" tIns="0" rIns="0" bIns="0" rtlCol="0" anchor="ctr"/>
-          <a:lstStyle/>
-          <a:p>
-            <a:pPr algn="ctr" indent="0" marL="0">
-              <a:buNone/>
-            </a:pPr>
-            <a:r>
-              <a:rPr lang="en-US" sz="1250" b="1" dirty="0">
-                <a:solidFill>
-                  <a:srgbClr val="D97706"/>
-                </a:solidFill>
-                <a:latin typeface="Cambria" pitchFamily="34" charset="0"/>
-                <a:ea typeface="Cambria" pitchFamily="34" charset="-122"/>
-                <a:cs typeface="Cambria" pitchFamily="34" charset="-120"/>
-              </a:rPr>
-              <a:t>Elephant Footing</a:t>
-            </a:r>
-            <a:endParaRPr lang="en-US" sz="1250" dirty="0"/>
-          </a:p>
-        </p:txBody>
-      </p:sp>
-      <p:sp>
-        <p:nvSpPr>
-          <p:cNvPr id="12" name="Text 9"/>
-          <p:cNvSpPr txBox="1"/>
-          <p:nvPr/>
-        </p:nvSpPr>
-        <p:spPr>
-          <a:xfrm>
-            <a:off x="649224" y="5376672"/>
-            <a:ext cx="2336292" cy="566928"/>
-          </a:xfrm>
-          <a:prstGeom prst="rect">
-            <a:avLst/>
-          </a:prstGeom>
-          <a:noFill/>
-          <a:ln/>
-        </p:spPr>
-        <p:txBody>
-          <a:bodyPr wrap="square" lIns="0" tIns="0" rIns="0" bIns="0" rtlCol="0" anchor="t"/>
-          <a:lstStyle/>
-          <a:p>
-            <a:pPr algn="ctr" indent="0" marL="0">
-              <a:lnSpc>
-                <a:spcPct val="110000"/>
-              </a:lnSpc>
-              <a:buNone/>
-            </a:pPr>
-            <a:r>
-              <a:rPr lang="en-US" sz="830" i="1" dirty="0">
-                <a:solidFill>
-                  <a:srgbClr val="8592A3"/>
-                </a:solidFill>
-                <a:latin typeface="Calibri" pitchFamily="34" charset="0"/>
-                <a:ea typeface="Calibri" pitchFamily="34" charset="-122"/>
-                <a:cs typeface="Calibri" pitchFamily="34" charset="-120"/>
-              </a:rPr>
-              <a:t>the first layer over-extrudes and squishes outward under the nozzle</a:t>
-            </a:r>
-            <a:endParaRPr lang="en-US" sz="830" dirty="0"/>
-          </a:p>
-        </p:txBody>
-      </p:sp>
-      <p:sp>
-        <p:nvSpPr>
-          <p:cNvPr id="13" name="Text 10"/>
-          <p:cNvSpPr txBox="1"/>
-          <p:nvPr/>
-        </p:nvSpPr>
-        <p:spPr>
-          <a:xfrm>
-            <a:off x="649224" y="5833872"/>
-            <a:ext cx="2336292" cy="530352"/>
-          </a:xfrm>
-          <a:prstGeom prst="rect">
-            <a:avLst/>
-          </a:prstGeom>
-          <a:noFill/>
-          <a:ln/>
-        </p:spPr>
-        <p:txBody>
-          <a:bodyPr wrap="square" lIns="0" tIns="0" rIns="0" bIns="0" rtlCol="0" anchor="t"/>
+      <p:sp>
+        <p:nvSpPr>
+          <p:cNvPr id="9" name="Text 7"/>
+          <p:cNvSpPr txBox="1"/>
+          <p:nvPr/>
+        </p:nvSpPr>
+        <p:spPr>
+          <a:xfrm>
+            <a:off x="731520" y="5321808"/>
+            <a:ext cx="10744200" cy="557784"/>
+          </a:xfrm>
+          <a:prstGeom prst="rect">
+            <a:avLst/>
+          </a:prstGeom>
+          <a:noFill/>
+          <a:ln/>
+        </p:spPr>
+        <p:txBody>
+          <a:bodyPr wrap="square" lIns="0" tIns="0" rIns="0" bIns="0" rtlCol="0" anchor="ctr"/>
           <a:lstStyle/>
           <a:p>
             <a:pPr indent="0" marL="0">
               <a:lnSpc>
-                <a:spcPct val="112000"/>
+                <a:spcPct val="115000"/>
               </a:lnSpc>
               <a:buNone/>
             </a:pPr>
             <a:r>
-              <a:rPr lang="en-US" sz="860" b="1" dirty="0">
-                <a:solidFill>
-                  <a:srgbClr val="1B8A8A"/>
-                </a:solidFill>
-                <a:latin typeface="Calibri" pitchFamily="34" charset="0"/>
-                <a:ea typeface="Calibri" pitchFamily="34" charset="-122"/>
-                <a:cs typeface="Calibri" pitchFamily="34" charset="-120"/>
-              </a:rPr>
-              <a:t>Fix — </a:t>
+              <a:rPr lang="en-US" sz="1250" b="1" dirty="0">
+                <a:solidFill>
+                  <a:srgbClr val="C0392B"/>
+                </a:solidFill>
+                <a:latin typeface="Calibri" pitchFamily="34" charset="0"/>
+                <a:ea typeface="Calibri" pitchFamily="34" charset="-122"/>
+                <a:cs typeface="Calibri" pitchFamily="34" charset="-120"/>
+              </a:rPr>
+              <a:t>PPE is not optional:  </a:t>
             </a:r>
             <a:pPr indent="0" marL="0">
               <a:lnSpc>
-                <a:spcPct val="112000"/>
+                <a:spcPct val="115000"/>
               </a:lnSpc>
               <a:buNone/>
             </a:pPr>
             <a:r>
-              <a:rPr lang="en-US" sz="860" dirty="0">
+              <a:rPr lang="en-US" sz="1250" dirty="0">
                 <a:solidFill>
                   <a:srgbClr val="44536B"/>
                 </a:solidFill>
@@ -45070,582 +44926,9 @@
                 <a:ea typeface="Calibri" pitchFamily="34" charset="-122"/>
                 <a:cs typeface="Calibri" pitchFamily="34" charset="-120"/>
               </a:rPr>
-              <a:t>add a brim, or reduce first-layer horizontal expansion</a:t>
-            </a:r>
-            <a:endParaRPr lang="en-US" sz="860" dirty="0"/>
-          </a:p>
-        </p:txBody>
-      </p:sp>
-      <p:sp>
-        <p:nvSpPr>
-          <p:cNvPr id="14" name="Shape 11"/>
-          <p:cNvSpPr/>
-          <p:nvPr/>
-        </p:nvSpPr>
-        <p:spPr>
-          <a:xfrm>
-            <a:off x="3360420" y="3977640"/>
-            <a:ext cx="2628900" cy="2423160"/>
-          </a:xfrm>
-          <a:prstGeom prst="roundRect">
-            <a:avLst>
-              <a:gd name="adj" fmla="val 2642"/>
-            </a:avLst>
-          </a:prstGeom>
-          <a:solidFill>
-            <a:srgbClr val="F3F6F9"/>
-          </a:solidFill>
-          <a:ln w="12700">
-            <a:solidFill>
-              <a:srgbClr val="E1E7EE"/>
-            </a:solidFill>
-            <a:prstDash val="solid"/>
-          </a:ln>
-        </p:spPr>
-      </p:sp>
-      <p:pic>
-        <p:nvPicPr>
-          <p:cNvPr id="15" name="Image 1" descr="/tmp/mech151_deck/images/32_stringing.png">    </p:cNvPr>
-          <p:cNvPicPr>
-            <a:picLocks noChangeAspect="1"/>
-          </p:cNvPicPr>
-          <p:nvPr/>
-        </p:nvPicPr>
-        <p:blipFill>
-          <a:blip r:embed="rId2"/>
-          <a:stretch>
-            <a:fillRect/>
-          </a:stretch>
-        </p:blipFill>
-        <p:spPr>
-          <a:xfrm>
-            <a:off x="3921866" y="4105656"/>
-            <a:ext cx="1506008" cy="960120"/>
-          </a:xfrm>
-          <a:prstGeom prst="rect">
-            <a:avLst/>
-          </a:prstGeom>
-        </p:spPr>
-      </p:pic>
-      <p:sp>
-        <p:nvSpPr>
-          <p:cNvPr id="16" name="Text 12"/>
-          <p:cNvSpPr txBox="1"/>
-          <p:nvPr/>
-        </p:nvSpPr>
-        <p:spPr>
-          <a:xfrm>
-            <a:off x="3497580" y="5120640"/>
-            <a:ext cx="2354580" cy="237744"/>
-          </a:xfrm>
-          <a:prstGeom prst="rect">
-            <a:avLst/>
-          </a:prstGeom>
-          <a:noFill/>
-          <a:ln/>
-        </p:spPr>
-        <p:txBody>
-          <a:bodyPr wrap="square" lIns="0" tIns="0" rIns="0" bIns="0" rtlCol="0" anchor="ctr"/>
-          <a:lstStyle/>
-          <a:p>
-            <a:pPr algn="ctr" indent="0" marL="0">
-              <a:buNone/>
-            </a:pPr>
-            <a:r>
-              <a:rPr lang="en-US" sz="1250" b="1" dirty="0">
-                <a:solidFill>
-                  <a:srgbClr val="D97706"/>
-                </a:solidFill>
-                <a:latin typeface="Cambria" pitchFamily="34" charset="0"/>
-                <a:ea typeface="Cambria" pitchFamily="34" charset="-122"/>
-                <a:cs typeface="Cambria" pitchFamily="34" charset="-120"/>
-              </a:rPr>
-              <a:t>Stringing</a:t>
+              <a:t>per the syllabus, a participant without proper PPE during machine use will be asked to leave the class for that session.</a:t>
             </a:r>
             <a:endParaRPr lang="en-US" sz="1250" dirty="0"/>
-          </a:p>
-        </p:txBody>
-      </p:sp>
-      <p:sp>
-        <p:nvSpPr>
-          <p:cNvPr id="17" name="Text 13"/>
-          <p:cNvSpPr txBox="1"/>
-          <p:nvPr/>
-        </p:nvSpPr>
-        <p:spPr>
-          <a:xfrm>
-            <a:off x="3506724" y="5376672"/>
-            <a:ext cx="2336292" cy="566928"/>
-          </a:xfrm>
-          <a:prstGeom prst="rect">
-            <a:avLst/>
-          </a:prstGeom>
-          <a:noFill/>
-          <a:ln/>
-        </p:spPr>
-        <p:txBody>
-          <a:bodyPr wrap="square" lIns="0" tIns="0" rIns="0" bIns="0" rtlCol="0" anchor="t"/>
-          <a:lstStyle/>
-          <a:p>
-            <a:pPr algn="ctr" indent="0" marL="0">
-              <a:lnSpc>
-                <a:spcPct val="110000"/>
-              </a:lnSpc>
-              <a:buNone/>
-            </a:pPr>
-            <a:r>
-              <a:rPr lang="en-US" sz="830" i="1" dirty="0">
-                <a:solidFill>
-                  <a:srgbClr val="8592A3"/>
-                </a:solidFill>
-                <a:latin typeface="Calibri" pitchFamily="34" charset="0"/>
-                <a:ea typeface="Calibri" pitchFamily="34" charset="-122"/>
-                <a:cs typeface="Calibri" pitchFamily="34" charset="-120"/>
-              </a:rPr>
-              <a:t>molten filament oozes from the nozzle while traveling between features</a:t>
-            </a:r>
-            <a:endParaRPr lang="en-US" sz="830" dirty="0"/>
-          </a:p>
-        </p:txBody>
-      </p:sp>
-      <p:sp>
-        <p:nvSpPr>
-          <p:cNvPr id="18" name="Text 14"/>
-          <p:cNvSpPr txBox="1"/>
-          <p:nvPr/>
-        </p:nvSpPr>
-        <p:spPr>
-          <a:xfrm>
-            <a:off x="3506724" y="5833872"/>
-            <a:ext cx="2336292" cy="530352"/>
-          </a:xfrm>
-          <a:prstGeom prst="rect">
-            <a:avLst/>
-          </a:prstGeom>
-          <a:noFill/>
-          <a:ln/>
-        </p:spPr>
-        <p:txBody>
-          <a:bodyPr wrap="square" lIns="0" tIns="0" rIns="0" bIns="0" rtlCol="0" anchor="t"/>
-          <a:lstStyle/>
-          <a:p>
-            <a:pPr indent="0" marL="0">
-              <a:lnSpc>
-                <a:spcPct val="112000"/>
-              </a:lnSpc>
-              <a:buNone/>
-            </a:pPr>
-            <a:r>
-              <a:rPr lang="en-US" sz="860" b="1" dirty="0">
-                <a:solidFill>
-                  <a:srgbClr val="1B8A8A"/>
-                </a:solidFill>
-                <a:latin typeface="Calibri" pitchFamily="34" charset="0"/>
-                <a:ea typeface="Calibri" pitchFamily="34" charset="-122"/>
-                <a:cs typeface="Calibri" pitchFamily="34" charset="-120"/>
-              </a:rPr>
-              <a:t>Fix — </a:t>
-            </a:r>
-            <a:pPr indent="0" marL="0">
-              <a:lnSpc>
-                <a:spcPct val="112000"/>
-              </a:lnSpc>
-              <a:buNone/>
-            </a:pPr>
-            <a:r>
-              <a:rPr lang="en-US" sz="860" dirty="0">
-                <a:solidFill>
-                  <a:srgbClr val="44536B"/>
-                </a:solidFill>
-                <a:latin typeface="Calibri" pitchFamily="34" charset="0"/>
-                <a:ea typeface="Calibri" pitchFamily="34" charset="-122"/>
-                <a:cs typeface="Calibri" pitchFamily="34" charset="-120"/>
-              </a:rPr>
-              <a:t>dry the filament; tighten retraction distance/speed</a:t>
-            </a:r>
-            <a:endParaRPr lang="en-US" sz="860" dirty="0"/>
-          </a:p>
-        </p:txBody>
-      </p:sp>
-      <p:sp>
-        <p:nvSpPr>
-          <p:cNvPr id="19" name="Shape 15"/>
-          <p:cNvSpPr/>
-          <p:nvPr/>
-        </p:nvSpPr>
-        <p:spPr>
-          <a:xfrm>
-            <a:off x="6217920" y="3977640"/>
-            <a:ext cx="2628900" cy="2423160"/>
-          </a:xfrm>
-          <a:prstGeom prst="roundRect">
-            <a:avLst>
-              <a:gd name="adj" fmla="val 2642"/>
-            </a:avLst>
-          </a:prstGeom>
-          <a:solidFill>
-            <a:srgbClr val="F3F6F9"/>
-          </a:solidFill>
-          <a:ln w="12700">
-            <a:solidFill>
-              <a:srgbClr val="E1E7EE"/>
-            </a:solidFill>
-            <a:prstDash val="solid"/>
-          </a:ln>
-        </p:spPr>
-      </p:sp>
-      <p:pic>
-        <p:nvPicPr>
-          <p:cNvPr id="20" name="Image 2" descr="/tmp/mech151_deck/images/33_warping.png">    </p:cNvPr>
-          <p:cNvPicPr>
-            <a:picLocks noChangeAspect="1"/>
-          </p:cNvPicPr>
-          <p:nvPr/>
-        </p:nvPicPr>
-        <p:blipFill>
-          <a:blip r:embed="rId3"/>
-          <a:stretch>
-            <a:fillRect/>
-          </a:stretch>
-        </p:blipFill>
-        <p:spPr>
-          <a:xfrm>
-            <a:off x="6453279" y="4105656"/>
-            <a:ext cx="2158183" cy="960120"/>
-          </a:xfrm>
-          <a:prstGeom prst="rect">
-            <a:avLst/>
-          </a:prstGeom>
-        </p:spPr>
-      </p:pic>
-      <p:sp>
-        <p:nvSpPr>
-          <p:cNvPr id="21" name="Text 16"/>
-          <p:cNvSpPr txBox="1"/>
-          <p:nvPr/>
-        </p:nvSpPr>
-        <p:spPr>
-          <a:xfrm>
-            <a:off x="6355080" y="5120640"/>
-            <a:ext cx="2354580" cy="237744"/>
-          </a:xfrm>
-          <a:prstGeom prst="rect">
-            <a:avLst/>
-          </a:prstGeom>
-          <a:noFill/>
-          <a:ln/>
-        </p:spPr>
-        <p:txBody>
-          <a:bodyPr wrap="square" lIns="0" tIns="0" rIns="0" bIns="0" rtlCol="0" anchor="ctr"/>
-          <a:lstStyle/>
-          <a:p>
-            <a:pPr algn="ctr" indent="0" marL="0">
-              <a:buNone/>
-            </a:pPr>
-            <a:r>
-              <a:rPr lang="en-US" sz="1250" b="1" dirty="0">
-                <a:solidFill>
-                  <a:srgbClr val="D97706"/>
-                </a:solidFill>
-                <a:latin typeface="Cambria" pitchFamily="34" charset="0"/>
-                <a:ea typeface="Cambria" pitchFamily="34" charset="-122"/>
-                <a:cs typeface="Cambria" pitchFamily="34" charset="-120"/>
-              </a:rPr>
-              <a:t>Warping</a:t>
-            </a:r>
-            <a:endParaRPr lang="en-US" sz="1250" dirty="0"/>
-          </a:p>
-        </p:txBody>
-      </p:sp>
-      <p:sp>
-        <p:nvSpPr>
-          <p:cNvPr id="22" name="Text 17"/>
-          <p:cNvSpPr txBox="1"/>
-          <p:nvPr/>
-        </p:nvSpPr>
-        <p:spPr>
-          <a:xfrm>
-            <a:off x="6364224" y="5376672"/>
-            <a:ext cx="2336292" cy="566928"/>
-          </a:xfrm>
-          <a:prstGeom prst="rect">
-            <a:avLst/>
-          </a:prstGeom>
-          <a:noFill/>
-          <a:ln/>
-        </p:spPr>
-        <p:txBody>
-          <a:bodyPr wrap="square" lIns="0" tIns="0" rIns="0" bIns="0" rtlCol="0" anchor="t"/>
-          <a:lstStyle/>
-          <a:p>
-            <a:pPr algn="ctr" indent="0" marL="0">
-              <a:lnSpc>
-                <a:spcPct val="110000"/>
-              </a:lnSpc>
-              <a:buNone/>
-            </a:pPr>
-            <a:r>
-              <a:rPr lang="en-US" sz="830" i="1" dirty="0">
-                <a:solidFill>
-                  <a:srgbClr val="8592A3"/>
-                </a:solidFill>
-                <a:latin typeface="Calibri" pitchFamily="34" charset="0"/>
-                <a:ea typeface="Calibri" pitchFamily="34" charset="-122"/>
-                <a:cs typeface="Calibri" pitchFamily="34" charset="-120"/>
-              </a:rPr>
-              <a:t>outer edges cool and shrink faster than the center, curling corners up</a:t>
-            </a:r>
-            <a:endParaRPr lang="en-US" sz="830" dirty="0"/>
-          </a:p>
-        </p:txBody>
-      </p:sp>
-      <p:sp>
-        <p:nvSpPr>
-          <p:cNvPr id="23" name="Text 18"/>
-          <p:cNvSpPr txBox="1"/>
-          <p:nvPr/>
-        </p:nvSpPr>
-        <p:spPr>
-          <a:xfrm>
-            <a:off x="6364224" y="5833872"/>
-            <a:ext cx="2336292" cy="530352"/>
-          </a:xfrm>
-          <a:prstGeom prst="rect">
-            <a:avLst/>
-          </a:prstGeom>
-          <a:noFill/>
-          <a:ln/>
-        </p:spPr>
-        <p:txBody>
-          <a:bodyPr wrap="square" lIns="0" tIns="0" rIns="0" bIns="0" rtlCol="0" anchor="t"/>
-          <a:lstStyle/>
-          <a:p>
-            <a:pPr indent="0" marL="0">
-              <a:lnSpc>
-                <a:spcPct val="112000"/>
-              </a:lnSpc>
-              <a:buNone/>
-            </a:pPr>
-            <a:r>
-              <a:rPr lang="en-US" sz="860" b="1" dirty="0">
-                <a:solidFill>
-                  <a:srgbClr val="1B8A8A"/>
-                </a:solidFill>
-                <a:latin typeface="Calibri" pitchFamily="34" charset="0"/>
-                <a:ea typeface="Calibri" pitchFamily="34" charset="-122"/>
-                <a:cs typeface="Calibri" pitchFamily="34" charset="-120"/>
-              </a:rPr>
-              <a:t>Fix — </a:t>
-            </a:r>
-            <a:pPr indent="0" marL="0">
-              <a:lnSpc>
-                <a:spcPct val="112000"/>
-              </a:lnSpc>
-              <a:buNone/>
-            </a:pPr>
-            <a:r>
-              <a:rPr lang="en-US" sz="860" dirty="0">
-                <a:solidFill>
-                  <a:srgbClr val="44536B"/>
-                </a:solidFill>
-                <a:latin typeface="Calibri" pitchFamily="34" charset="0"/>
-                <a:ea typeface="Calibri" pitchFamily="34" charset="-122"/>
-                <a:cs typeface="Calibri" pitchFamily="34" charset="-120"/>
-              </a:rPr>
-              <a:t>add a brim/raft; enclose the printer or use a heated bed</a:t>
-            </a:r>
-            <a:endParaRPr lang="en-US" sz="860" dirty="0"/>
-          </a:p>
-        </p:txBody>
-      </p:sp>
-      <p:sp>
-        <p:nvSpPr>
-          <p:cNvPr id="24" name="Shape 19"/>
-          <p:cNvSpPr/>
-          <p:nvPr/>
-        </p:nvSpPr>
-        <p:spPr>
-          <a:xfrm>
-            <a:off x="9075420" y="3977640"/>
-            <a:ext cx="2628900" cy="2423160"/>
-          </a:xfrm>
-          <a:prstGeom prst="roundRect">
-            <a:avLst>
-              <a:gd name="adj" fmla="val 2642"/>
-            </a:avLst>
-          </a:prstGeom>
-          <a:solidFill>
-            <a:srgbClr val="F3F6F9"/>
-          </a:solidFill>
-          <a:ln w="12700">
-            <a:solidFill>
-              <a:srgbClr val="E1E7EE"/>
-            </a:solidFill>
-            <a:prstDash val="solid"/>
-          </a:ln>
-        </p:spPr>
-      </p:sp>
-      <p:pic>
-        <p:nvPicPr>
-          <p:cNvPr id="25" name="Image 3" descr="/tmp/mech151_deck/images/34_delamination.png">    </p:cNvPr>
-          <p:cNvPicPr>
-            <a:picLocks noChangeAspect="1"/>
-          </p:cNvPicPr>
-          <p:nvPr/>
-        </p:nvPicPr>
-        <p:blipFill>
-          <a:blip r:embed="rId4"/>
-          <a:stretch>
-            <a:fillRect/>
-          </a:stretch>
-        </p:blipFill>
-        <p:spPr>
-          <a:xfrm>
-            <a:off x="9458285" y="4105656"/>
-            <a:ext cx="1863170" cy="960120"/>
-          </a:xfrm>
-          <a:prstGeom prst="rect">
-            <a:avLst/>
-          </a:prstGeom>
-        </p:spPr>
-      </p:pic>
-      <p:sp>
-        <p:nvSpPr>
-          <p:cNvPr id="26" name="Text 20"/>
-          <p:cNvSpPr txBox="1"/>
-          <p:nvPr/>
-        </p:nvSpPr>
-        <p:spPr>
-          <a:xfrm>
-            <a:off x="9212580" y="5120640"/>
-            <a:ext cx="2354580" cy="237744"/>
-          </a:xfrm>
-          <a:prstGeom prst="rect">
-            <a:avLst/>
-          </a:prstGeom>
-          <a:noFill/>
-          <a:ln/>
-        </p:spPr>
-        <p:txBody>
-          <a:bodyPr wrap="square" lIns="0" tIns="0" rIns="0" bIns="0" rtlCol="0" anchor="ctr"/>
-          <a:lstStyle/>
-          <a:p>
-            <a:pPr algn="ctr" indent="0" marL="0">
-              <a:buNone/>
-            </a:pPr>
-            <a:r>
-              <a:rPr lang="en-US" sz="1250" b="1" dirty="0">
-                <a:solidFill>
-                  <a:srgbClr val="D97706"/>
-                </a:solidFill>
-                <a:latin typeface="Cambria" pitchFamily="34" charset="0"/>
-                <a:ea typeface="Cambria" pitchFamily="34" charset="-122"/>
-                <a:cs typeface="Cambria" pitchFamily="34" charset="-120"/>
-              </a:rPr>
-              <a:t>Layer Separation</a:t>
-            </a:r>
-            <a:endParaRPr lang="en-US" sz="1250" dirty="0"/>
-          </a:p>
-        </p:txBody>
-      </p:sp>
-      <p:sp>
-        <p:nvSpPr>
-          <p:cNvPr id="27" name="Text 21"/>
-          <p:cNvSpPr txBox="1"/>
-          <p:nvPr/>
-        </p:nvSpPr>
-        <p:spPr>
-          <a:xfrm>
-            <a:off x="9221724" y="5376672"/>
-            <a:ext cx="2336292" cy="566928"/>
-          </a:xfrm>
-          <a:prstGeom prst="rect">
-            <a:avLst/>
-          </a:prstGeom>
-          <a:noFill/>
-          <a:ln/>
-        </p:spPr>
-        <p:txBody>
-          <a:bodyPr wrap="square" lIns="0" tIns="0" rIns="0" bIns="0" rtlCol="0" anchor="t"/>
-          <a:lstStyle/>
-          <a:p>
-            <a:pPr algn="ctr" indent="0" marL="0">
-              <a:lnSpc>
-                <a:spcPct val="110000"/>
-              </a:lnSpc>
-              <a:buNone/>
-            </a:pPr>
-            <a:r>
-              <a:rPr lang="en-US" sz="830" i="1" dirty="0">
-                <a:solidFill>
-                  <a:srgbClr val="8592A3"/>
-                </a:solidFill>
-                <a:latin typeface="Calibri" pitchFamily="34" charset="0"/>
-                <a:ea typeface="Calibri" pitchFamily="34" charset="-122"/>
-                <a:cs typeface="Calibri" pitchFamily="34" charset="-120"/>
-              </a:rPr>
-              <a:t>layers don't fully fuse — often too cold, or cooled by a draft</a:t>
-            </a:r>
-            <a:endParaRPr lang="en-US" sz="830" dirty="0"/>
-          </a:p>
-        </p:txBody>
-      </p:sp>
-      <p:sp>
-        <p:nvSpPr>
-          <p:cNvPr id="28" name="Text 22"/>
-          <p:cNvSpPr txBox="1"/>
-          <p:nvPr/>
-        </p:nvSpPr>
-        <p:spPr>
-          <a:xfrm>
-            <a:off x="9221724" y="5833872"/>
-            <a:ext cx="2336292" cy="530352"/>
-          </a:xfrm>
-          <a:prstGeom prst="rect">
-            <a:avLst/>
-          </a:prstGeom>
-          <a:noFill/>
-          <a:ln/>
-        </p:spPr>
-        <p:txBody>
-          <a:bodyPr wrap="square" lIns="0" tIns="0" rIns="0" bIns="0" rtlCol="0" anchor="t"/>
-          <a:lstStyle/>
-          <a:p>
-            <a:pPr indent="0" marL="0">
-              <a:lnSpc>
-                <a:spcPct val="112000"/>
-              </a:lnSpc>
-              <a:buNone/>
-            </a:pPr>
-            <a:r>
-              <a:rPr lang="en-US" sz="860" b="1" dirty="0">
-                <a:solidFill>
-                  <a:srgbClr val="1B8A8A"/>
-                </a:solidFill>
-                <a:latin typeface="Calibri" pitchFamily="34" charset="0"/>
-                <a:ea typeface="Calibri" pitchFamily="34" charset="-122"/>
-                <a:cs typeface="Calibri" pitchFamily="34" charset="-120"/>
-              </a:rPr>
-              <a:t>Fix — </a:t>
-            </a:r>
-            <a:pPr indent="0" marL="0">
-              <a:lnSpc>
-                <a:spcPct val="112000"/>
-              </a:lnSpc>
-              <a:buNone/>
-            </a:pPr>
-            <a:r>
-              <a:rPr lang="en-US" sz="860" dirty="0">
-                <a:solidFill>
-                  <a:srgbClr val="44536B"/>
-                </a:solidFill>
-                <a:latin typeface="Calibri" pitchFamily="34" charset="0"/>
-                <a:ea typeface="Calibri" pitchFamily="34" charset="-122"/>
-                <a:cs typeface="Calibri" pitchFamily="34" charset="-120"/>
-              </a:rPr>
-              <a:t>raise nozzle temp slightly; shield the print from drafts</a:t>
-            </a:r>
-            <a:endParaRPr lang="en-US" sz="860" dirty="0"/>
           </a:p>
         </p:txBody>
       </p:sp>
@@ -46682,7 +45965,7 @@
                 <a:ea typeface="Cambria" pitchFamily="34" charset="-122"/>
                 <a:cs typeface="Cambria" pitchFamily="34" charset="-120"/>
               </a:rPr>
-              <a:t>Subtractive Manufacturing (CNC)</a:t>
+              <a:t>Additive Manufacturing (3D Printing)</a:t>
             </a:r>
             <a:endParaRPr lang="en-US" sz="2600" dirty="0"/>
           </a:p>
@@ -46721,7 +46004,7 @@
                 <a:ea typeface="Calibri" pitchFamily="34" charset="-122"/>
                 <a:cs typeface="Calibri" pitchFamily="34" charset="-120"/>
               </a:rPr>
-              <a:t>Starts with solid stock and cuts material away — design constraints come from the tool and how the part is held.</a:t>
+              <a:t>The course uses material-extrusion printing (FDM/FFF), building one deposited layer at a time.</a:t>
             </a:r>
             <a:endParaRPr lang="en-US" sz="1250" dirty="0"/>
           </a:p>
@@ -46768,18 +46051,254 @@
       </p:sp>
       <p:sp>
         <p:nvSpPr>
-          <p:cNvPr id="7" name="Shape 5"/>
-          <p:cNvSpPr/>
-          <p:nvPr/>
-        </p:nvSpPr>
-        <p:spPr>
-          <a:xfrm>
-            <a:off x="502920" y="1783080"/>
-            <a:ext cx="3581400" cy="2606040"/>
+          <p:cNvPr id="7" name="Text 5"/>
+          <p:cNvSpPr txBox="1"/>
+          <p:nvPr/>
+        </p:nvSpPr>
+        <p:spPr>
+          <a:xfrm>
+            <a:off x="502920" y="1965960"/>
+            <a:ext cx="11201400" cy="1600200"/>
+          </a:xfrm>
+          <a:prstGeom prst="rect">
+            <a:avLst/>
+          </a:prstGeom>
+          <a:noFill/>
+          <a:ln/>
+        </p:spPr>
+        <p:txBody>
+          <a:bodyPr wrap="square" lIns="0" tIns="0" rIns="0" bIns="0" rtlCol="0" anchor="t"/>
+          <a:lstStyle/>
+          <a:p>
+            <a:pPr marL="342900" indent="-342900">
+              <a:buSzPct val="100000"/>
+              <a:buChar char="●"/>
+            </a:pPr>
+            <a:r>
+              <a:rPr lang="en-US" sz="1250" b="1" dirty="0">
+                <a:solidFill>
+                  <a:srgbClr val="0F2942"/>
+                </a:solidFill>
+                <a:latin typeface="Calibri" pitchFamily="34" charset="0"/>
+                <a:ea typeface="Calibri" pitchFamily="34" charset="-122"/>
+                <a:cs typeface="Calibri" pitchFamily="34" charset="-120"/>
+              </a:rPr>
+              <a:t>Materials — </a:t>
+            </a:r>
+            <a:pPr indent="0" marL="0">
+              <a:spcAft>
+                <a:spcPts val="800"/>
+              </a:spcAft>
+              <a:buNone/>
+            </a:pPr>
+            <a:r>
+              <a:rPr lang="en-US" sz="1250" dirty="0">
+                <a:solidFill>
+                  <a:srgbClr val="44536B"/>
+                </a:solidFill>
+                <a:latin typeface="Calibri" pitchFamily="34" charset="0"/>
+                <a:ea typeface="Calibri" pitchFamily="34" charset="-122"/>
+                <a:cs typeface="Calibri" pitchFamily="34" charset="-120"/>
+              </a:rPr>
+              <a:t>PLA, PETG, ABS — printability, strength, and temperature trade-offs</a:t>
+            </a:r>
+            <a:endParaRPr lang="en-US" sz="1250" dirty="0"/>
+          </a:p>
+          <a:p>
+            <a:pPr marL="342900" indent="-342900">
+              <a:buSzPct val="100000"/>
+              <a:buChar char="●"/>
+            </a:pPr>
+            <a:r>
+              <a:rPr lang="en-US" sz="1250" b="1" dirty="0">
+                <a:solidFill>
+                  <a:srgbClr val="0F2942"/>
+                </a:solidFill>
+                <a:latin typeface="Calibri" pitchFamily="34" charset="0"/>
+                <a:ea typeface="Calibri" pitchFamily="34" charset="-122"/>
+                <a:cs typeface="Calibri" pitchFamily="34" charset="-120"/>
+              </a:rPr>
+              <a:t>Orientation — </a:t>
+            </a:r>
+            <a:pPr indent="0" marL="0">
+              <a:spcAft>
+                <a:spcPts val="800"/>
+              </a:spcAft>
+              <a:buNone/>
+            </a:pPr>
+            <a:r>
+              <a:rPr lang="en-US" sz="1250" dirty="0">
+                <a:solidFill>
+                  <a:srgbClr val="44536B"/>
+                </a:solidFill>
+                <a:latin typeface="Calibri" pitchFamily="34" charset="0"/>
+                <a:ea typeface="Calibri" pitchFamily="34" charset="-122"/>
+                <a:cs typeface="Calibri" pitchFamily="34" charset="-120"/>
+              </a:rPr>
+              <a:t>layers are weakest in the build (Z) direction — a strength decision, not just fit-on-bed</a:t>
+            </a:r>
+            <a:endParaRPr lang="en-US" sz="1250" dirty="0"/>
+          </a:p>
+          <a:p>
+            <a:pPr marL="342900" indent="-342900">
+              <a:buSzPct val="100000"/>
+              <a:buChar char="●"/>
+            </a:pPr>
+            <a:r>
+              <a:rPr lang="en-US" sz="1250" b="1" dirty="0">
+                <a:solidFill>
+                  <a:srgbClr val="0F2942"/>
+                </a:solidFill>
+                <a:latin typeface="Calibri" pitchFamily="34" charset="0"/>
+                <a:ea typeface="Calibri" pitchFamily="34" charset="-122"/>
+                <a:cs typeface="Calibri" pitchFamily="34" charset="-120"/>
+              </a:rPr>
+              <a:t>Supports &amp; overhangs — </a:t>
+            </a:r>
+            <a:pPr indent="0" marL="0">
+              <a:spcAft>
+                <a:spcPts val="800"/>
+              </a:spcAft>
+              <a:buNone/>
+            </a:pPr>
+            <a:r>
+              <a:rPr lang="en-US" sz="1250" dirty="0">
+                <a:solidFill>
+                  <a:srgbClr val="44536B"/>
+                </a:solidFill>
+                <a:latin typeface="Calibri" pitchFamily="34" charset="0"/>
+                <a:ea typeface="Calibri" pitchFamily="34" charset="-122"/>
+                <a:cs typeface="Calibri" pitchFamily="34" charset="-120"/>
+              </a:rPr>
+              <a:t>the roughly 45° rule, bridging limits, designing to avoid support</a:t>
+            </a:r>
+            <a:endParaRPr lang="en-US" sz="1250" dirty="0"/>
+          </a:p>
+          <a:p>
+            <a:pPr marL="342900" indent="-342900">
+              <a:buSzPct val="100000"/>
+              <a:buChar char="●"/>
+            </a:pPr>
+            <a:r>
+              <a:rPr lang="en-US" sz="1250" b="1" dirty="0">
+                <a:solidFill>
+                  <a:srgbClr val="0F2942"/>
+                </a:solidFill>
+                <a:latin typeface="Calibri" pitchFamily="34" charset="0"/>
+                <a:ea typeface="Calibri" pitchFamily="34" charset="-122"/>
+                <a:cs typeface="Calibri" pitchFamily="34" charset="-120"/>
+              </a:rPr>
+              <a:t>Settings that matter — </a:t>
+            </a:r>
+            <a:pPr indent="0" marL="0">
+              <a:spcAft>
+                <a:spcPts val="800"/>
+              </a:spcAft>
+              <a:buNone/>
+            </a:pPr>
+            <a:r>
+              <a:rPr lang="en-US" sz="1250" dirty="0">
+                <a:solidFill>
+                  <a:srgbClr val="44536B"/>
+                </a:solidFill>
+                <a:latin typeface="Calibri" pitchFamily="34" charset="0"/>
+                <a:ea typeface="Calibri" pitchFamily="34" charset="-122"/>
+                <a:cs typeface="Calibri" pitchFamily="34" charset="-120"/>
+              </a:rPr>
+              <a:t>layer height, wall count, infill density and pattern</a:t>
+            </a:r>
+            <a:endParaRPr lang="en-US" sz="1250" dirty="0"/>
+          </a:p>
+          <a:p>
+            <a:pPr marL="342900" indent="-342900">
+              <a:buSzPct val="100000"/>
+              <a:buChar char="●"/>
+            </a:pPr>
+            <a:r>
+              <a:rPr lang="en-US" sz="1250" b="1" dirty="0">
+                <a:solidFill>
+                  <a:srgbClr val="0F2942"/>
+                </a:solidFill>
+                <a:latin typeface="Calibri" pitchFamily="34" charset="0"/>
+                <a:ea typeface="Calibri" pitchFamily="34" charset="-122"/>
+                <a:cs typeface="Calibri" pitchFamily="34" charset="-120"/>
+              </a:rPr>
+              <a:t>Tolerances — </a:t>
+            </a:r>
+            <a:pPr indent="0" marL="0">
+              <a:spcAft>
+                <a:spcPts val="800"/>
+              </a:spcAft>
+              <a:buNone/>
+            </a:pPr>
+            <a:r>
+              <a:rPr lang="en-US" sz="1250" dirty="0">
+                <a:solidFill>
+                  <a:srgbClr val="44536B"/>
+                </a:solidFill>
+                <a:latin typeface="Calibri" pitchFamily="34" charset="0"/>
+                <a:ea typeface="Calibri" pitchFamily="34" charset="-122"/>
+                <a:cs typeface="Calibri" pitchFamily="34" charset="-120"/>
+              </a:rPr>
+              <a:t>holes print undersize, first layers spread — allow for it or drill/ream after</a:t>
+            </a:r>
+            <a:endParaRPr lang="en-US" sz="1250" dirty="0"/>
+          </a:p>
+        </p:txBody>
+      </p:sp>
+      <p:sp>
+        <p:nvSpPr>
+          <p:cNvPr id="8" name="Text 6"/>
+          <p:cNvSpPr txBox="1"/>
+          <p:nvPr/>
+        </p:nvSpPr>
+        <p:spPr>
+          <a:xfrm>
+            <a:off x="502920" y="3657600"/>
+            <a:ext cx="11201400" cy="256032"/>
+          </a:xfrm>
+          <a:prstGeom prst="rect">
+            <a:avLst/>
+          </a:prstGeom>
+          <a:noFill/>
+          <a:ln/>
+        </p:spPr>
+        <p:txBody>
+          <a:bodyPr wrap="square" lIns="0" tIns="0" rIns="0" bIns="0" rtlCol="0" anchor="ctr"/>
+          <a:lstStyle/>
+          <a:p>
+            <a:pPr indent="0" marL="0">
+              <a:buNone/>
+            </a:pPr>
+            <a:r>
+              <a:rPr lang="en-US" sz="1150" b="1" i="1" dirty="0">
+                <a:solidFill>
+                  <a:srgbClr val="8592A3"/>
+                </a:solidFill>
+                <a:latin typeface="Calibri" pitchFamily="34" charset="0"/>
+                <a:ea typeface="Calibri" pitchFamily="34" charset="-122"/>
+                <a:cs typeface="Calibri" pitchFamily="34" charset="-120"/>
+              </a:rPr>
+              <a:t>Common Print Issues &amp; Fixes</a:t>
+            </a:r>
+            <a:endParaRPr lang="en-US" sz="1150" dirty="0"/>
+          </a:p>
+        </p:txBody>
+      </p:sp>
+      <p:sp>
+        <p:nvSpPr>
+          <p:cNvPr id="9" name="Shape 7"/>
+          <p:cNvSpPr/>
+          <p:nvPr/>
+        </p:nvSpPr>
+        <p:spPr>
+          <a:xfrm>
+            <a:off x="502920" y="3977640"/>
+            <a:ext cx="2628900" cy="2423160"/>
           </a:xfrm>
           <a:prstGeom prst="roundRect">
             <a:avLst>
-              <a:gd name="adj" fmla="val 2456"/>
+              <a:gd name="adj" fmla="val 2642"/>
             </a:avLst>
           </a:prstGeom>
           <a:solidFill>
@@ -46795,7 +46314,7 @@
       </p:sp>
       <p:pic>
         <p:nvPicPr>
-          <p:cNvPr id="8" name="Image 0" descr="/tmp/mech151_deck/images/38_workholding.png">    </p:cNvPr>
+          <p:cNvPr id="10" name="Image 0" descr="/tmp/mech151_deck/images/31_elephant_footing.png">    </p:cNvPr>
           <p:cNvPicPr>
             <a:picLocks noChangeAspect="1"/>
           </p:cNvPicPr>
@@ -46809,8 +46328,8 @@
         </p:blipFill>
         <p:spPr>
           <a:xfrm>
-            <a:off x="704358" y="1851660"/>
-            <a:ext cx="3178524" cy="2468880"/>
+            <a:off x="1304504" y="4105656"/>
+            <a:ext cx="1025732" cy="960120"/>
           </a:xfrm>
           <a:prstGeom prst="rect">
             <a:avLst/>
@@ -46819,18 +46338,158 @@
       </p:pic>
       <p:sp>
         <p:nvSpPr>
-          <p:cNvPr id="9" name="Shape 6"/>
-          <p:cNvSpPr/>
-          <p:nvPr/>
-        </p:nvSpPr>
-        <p:spPr>
-          <a:xfrm>
-            <a:off x="4312920" y="1783080"/>
-            <a:ext cx="3581400" cy="2606040"/>
+          <p:cNvPr id="11" name="Text 8"/>
+          <p:cNvSpPr txBox="1"/>
+          <p:nvPr/>
+        </p:nvSpPr>
+        <p:spPr>
+          <a:xfrm>
+            <a:off x="640080" y="5120640"/>
+            <a:ext cx="2354580" cy="237744"/>
+          </a:xfrm>
+          <a:prstGeom prst="rect">
+            <a:avLst/>
+          </a:prstGeom>
+          <a:noFill/>
+          <a:ln/>
+        </p:spPr>
+        <p:txBody>
+          <a:bodyPr wrap="square" lIns="0" tIns="0" rIns="0" bIns="0" rtlCol="0" anchor="ctr"/>
+          <a:lstStyle/>
+          <a:p>
+            <a:pPr algn="ctr" indent="0" marL="0">
+              <a:buNone/>
+            </a:pPr>
+            <a:r>
+              <a:rPr lang="en-US" sz="1250" b="1" dirty="0">
+                <a:solidFill>
+                  <a:srgbClr val="D97706"/>
+                </a:solidFill>
+                <a:latin typeface="Cambria" pitchFamily="34" charset="0"/>
+                <a:ea typeface="Cambria" pitchFamily="34" charset="-122"/>
+                <a:cs typeface="Cambria" pitchFamily="34" charset="-120"/>
+              </a:rPr>
+              <a:t>Elephant Footing</a:t>
+            </a:r>
+            <a:endParaRPr lang="en-US" sz="1250" dirty="0"/>
+          </a:p>
+        </p:txBody>
+      </p:sp>
+      <p:sp>
+        <p:nvSpPr>
+          <p:cNvPr id="12" name="Text 9"/>
+          <p:cNvSpPr txBox="1"/>
+          <p:nvPr/>
+        </p:nvSpPr>
+        <p:spPr>
+          <a:xfrm>
+            <a:off x="649224" y="5358384"/>
+            <a:ext cx="2336292" cy="621792"/>
+          </a:xfrm>
+          <a:prstGeom prst="rect">
+            <a:avLst/>
+          </a:prstGeom>
+          <a:noFill/>
+          <a:ln/>
+        </p:spPr>
+        <p:txBody>
+          <a:bodyPr wrap="square" lIns="0" tIns="0" rIns="0" bIns="0" rtlCol="0" anchor="t"/>
+          <a:lstStyle/>
+          <a:p>
+            <a:pPr algn="ctr" indent="0" marL="0">
+              <a:lnSpc>
+                <a:spcPct val="108000"/>
+              </a:lnSpc>
+              <a:buNone/>
+            </a:pPr>
+            <a:r>
+              <a:rPr lang="en-US" sz="980" i="1" dirty="0">
+                <a:solidFill>
+                  <a:srgbClr val="8592A3"/>
+                </a:solidFill>
+                <a:latin typeface="Calibri" pitchFamily="34" charset="0"/>
+                <a:ea typeface="Calibri" pitchFamily="34" charset="-122"/>
+                <a:cs typeface="Calibri" pitchFamily="34" charset="-120"/>
+              </a:rPr>
+              <a:t>the first layer over-extrudes and squishes outward under the nozzle</a:t>
+            </a:r>
+            <a:endParaRPr lang="en-US" sz="980" dirty="0"/>
+          </a:p>
+        </p:txBody>
+      </p:sp>
+      <p:sp>
+        <p:nvSpPr>
+          <p:cNvPr id="13" name="Text 10"/>
+          <p:cNvSpPr txBox="1"/>
+          <p:nvPr/>
+        </p:nvSpPr>
+        <p:spPr>
+          <a:xfrm>
+            <a:off x="649224" y="5797296"/>
+            <a:ext cx="2336292" cy="566928"/>
+          </a:xfrm>
+          <a:prstGeom prst="rect">
+            <a:avLst/>
+          </a:prstGeom>
+          <a:noFill/>
+          <a:ln/>
+        </p:spPr>
+        <p:txBody>
+          <a:bodyPr wrap="square" lIns="0" tIns="0" rIns="0" bIns="0" rtlCol="0" anchor="t"/>
+          <a:lstStyle/>
+          <a:p>
+            <a:pPr indent="0" marL="0">
+              <a:lnSpc>
+                <a:spcPct val="108000"/>
+              </a:lnSpc>
+              <a:buNone/>
+            </a:pPr>
+            <a:r>
+              <a:rPr lang="en-US" sz="980" b="1" dirty="0">
+                <a:solidFill>
+                  <a:srgbClr val="1B8A8A"/>
+                </a:solidFill>
+                <a:latin typeface="Calibri" pitchFamily="34" charset="0"/>
+                <a:ea typeface="Calibri" pitchFamily="34" charset="-122"/>
+                <a:cs typeface="Calibri" pitchFamily="34" charset="-120"/>
+              </a:rPr>
+              <a:t>Fix — </a:t>
+            </a:r>
+            <a:pPr indent="0" marL="0">
+              <a:lnSpc>
+                <a:spcPct val="108000"/>
+              </a:lnSpc>
+              <a:buNone/>
+            </a:pPr>
+            <a:r>
+              <a:rPr lang="en-US" sz="980" dirty="0">
+                <a:solidFill>
+                  <a:srgbClr val="44536B"/>
+                </a:solidFill>
+                <a:latin typeface="Calibri" pitchFamily="34" charset="0"/>
+                <a:ea typeface="Calibri" pitchFamily="34" charset="-122"/>
+                <a:cs typeface="Calibri" pitchFamily="34" charset="-120"/>
+              </a:rPr>
+              <a:t>add a brim, or reduce first-layer horizontal expansion</a:t>
+            </a:r>
+            <a:endParaRPr lang="en-US" sz="980" dirty="0"/>
+          </a:p>
+        </p:txBody>
+      </p:sp>
+      <p:sp>
+        <p:nvSpPr>
+          <p:cNvPr id="14" name="Shape 11"/>
+          <p:cNvSpPr/>
+          <p:nvPr/>
+        </p:nvSpPr>
+        <p:spPr>
+          <a:xfrm>
+            <a:off x="3360420" y="3977640"/>
+            <a:ext cx="2628900" cy="2423160"/>
           </a:xfrm>
           <a:prstGeom prst="roundRect">
             <a:avLst>
-              <a:gd name="adj" fmla="val 2456"/>
+              <a:gd name="adj" fmla="val 2642"/>
             </a:avLst>
           </a:prstGeom>
           <a:solidFill>
@@ -46846,7 +46505,7 @@
       </p:sp>
       <p:pic>
         <p:nvPicPr>
-          <p:cNvPr id="10" name="Image 1" descr="/tmp/mech151_deck/images/35_tool_corner.png">    </p:cNvPr>
+          <p:cNvPr id="15" name="Image 1" descr="/tmp/mech151_deck/images/32_stringing.png">    </p:cNvPr>
           <p:cNvPicPr>
             <a:picLocks noChangeAspect="1"/>
           </p:cNvPicPr>
@@ -46860,8 +46519,8 @@
         </p:blipFill>
         <p:spPr>
           <a:xfrm>
-            <a:off x="4707614" y="1851660"/>
-            <a:ext cx="2792013" cy="2468880"/>
+            <a:off x="3921866" y="4105656"/>
+            <a:ext cx="1506008" cy="960120"/>
           </a:xfrm>
           <a:prstGeom prst="rect">
             <a:avLst/>
@@ -46870,18 +46529,158 @@
       </p:pic>
       <p:sp>
         <p:nvSpPr>
-          <p:cNvPr id="11" name="Shape 7"/>
-          <p:cNvSpPr/>
-          <p:nvPr/>
-        </p:nvSpPr>
-        <p:spPr>
-          <a:xfrm>
-            <a:off x="8122920" y="1783080"/>
-            <a:ext cx="3581400" cy="2606040"/>
+          <p:cNvPr id="16" name="Text 12"/>
+          <p:cNvSpPr txBox="1"/>
+          <p:nvPr/>
+        </p:nvSpPr>
+        <p:spPr>
+          <a:xfrm>
+            <a:off x="3497580" y="5120640"/>
+            <a:ext cx="2354580" cy="237744"/>
+          </a:xfrm>
+          <a:prstGeom prst="rect">
+            <a:avLst/>
+          </a:prstGeom>
+          <a:noFill/>
+          <a:ln/>
+        </p:spPr>
+        <p:txBody>
+          <a:bodyPr wrap="square" lIns="0" tIns="0" rIns="0" bIns="0" rtlCol="0" anchor="ctr"/>
+          <a:lstStyle/>
+          <a:p>
+            <a:pPr algn="ctr" indent="0" marL="0">
+              <a:buNone/>
+            </a:pPr>
+            <a:r>
+              <a:rPr lang="en-US" sz="1250" b="1" dirty="0">
+                <a:solidFill>
+                  <a:srgbClr val="D97706"/>
+                </a:solidFill>
+                <a:latin typeface="Cambria" pitchFamily="34" charset="0"/>
+                <a:ea typeface="Cambria" pitchFamily="34" charset="-122"/>
+                <a:cs typeface="Cambria" pitchFamily="34" charset="-120"/>
+              </a:rPr>
+              <a:t>Stringing</a:t>
+            </a:r>
+            <a:endParaRPr lang="en-US" sz="1250" dirty="0"/>
+          </a:p>
+        </p:txBody>
+      </p:sp>
+      <p:sp>
+        <p:nvSpPr>
+          <p:cNvPr id="17" name="Text 13"/>
+          <p:cNvSpPr txBox="1"/>
+          <p:nvPr/>
+        </p:nvSpPr>
+        <p:spPr>
+          <a:xfrm>
+            <a:off x="3506724" y="5358384"/>
+            <a:ext cx="2336292" cy="621792"/>
+          </a:xfrm>
+          <a:prstGeom prst="rect">
+            <a:avLst/>
+          </a:prstGeom>
+          <a:noFill/>
+          <a:ln/>
+        </p:spPr>
+        <p:txBody>
+          <a:bodyPr wrap="square" lIns="0" tIns="0" rIns="0" bIns="0" rtlCol="0" anchor="t"/>
+          <a:lstStyle/>
+          <a:p>
+            <a:pPr algn="ctr" indent="0" marL="0">
+              <a:lnSpc>
+                <a:spcPct val="108000"/>
+              </a:lnSpc>
+              <a:buNone/>
+            </a:pPr>
+            <a:r>
+              <a:rPr lang="en-US" sz="980" i="1" dirty="0">
+                <a:solidFill>
+                  <a:srgbClr val="8592A3"/>
+                </a:solidFill>
+                <a:latin typeface="Calibri" pitchFamily="34" charset="0"/>
+                <a:ea typeface="Calibri" pitchFamily="34" charset="-122"/>
+                <a:cs typeface="Calibri" pitchFamily="34" charset="-120"/>
+              </a:rPr>
+              <a:t>molten filament oozes from the nozzle while traveling between features</a:t>
+            </a:r>
+            <a:endParaRPr lang="en-US" sz="980" dirty="0"/>
+          </a:p>
+        </p:txBody>
+      </p:sp>
+      <p:sp>
+        <p:nvSpPr>
+          <p:cNvPr id="18" name="Text 14"/>
+          <p:cNvSpPr txBox="1"/>
+          <p:nvPr/>
+        </p:nvSpPr>
+        <p:spPr>
+          <a:xfrm>
+            <a:off x="3506724" y="5797296"/>
+            <a:ext cx="2336292" cy="566928"/>
+          </a:xfrm>
+          <a:prstGeom prst="rect">
+            <a:avLst/>
+          </a:prstGeom>
+          <a:noFill/>
+          <a:ln/>
+        </p:spPr>
+        <p:txBody>
+          <a:bodyPr wrap="square" lIns="0" tIns="0" rIns="0" bIns="0" rtlCol="0" anchor="t"/>
+          <a:lstStyle/>
+          <a:p>
+            <a:pPr indent="0" marL="0">
+              <a:lnSpc>
+                <a:spcPct val="108000"/>
+              </a:lnSpc>
+              <a:buNone/>
+            </a:pPr>
+            <a:r>
+              <a:rPr lang="en-US" sz="980" b="1" dirty="0">
+                <a:solidFill>
+                  <a:srgbClr val="1B8A8A"/>
+                </a:solidFill>
+                <a:latin typeface="Calibri" pitchFamily="34" charset="0"/>
+                <a:ea typeface="Calibri" pitchFamily="34" charset="-122"/>
+                <a:cs typeface="Calibri" pitchFamily="34" charset="-120"/>
+              </a:rPr>
+              <a:t>Fix — </a:t>
+            </a:r>
+            <a:pPr indent="0" marL="0">
+              <a:lnSpc>
+                <a:spcPct val="108000"/>
+              </a:lnSpc>
+              <a:buNone/>
+            </a:pPr>
+            <a:r>
+              <a:rPr lang="en-US" sz="980" dirty="0">
+                <a:solidFill>
+                  <a:srgbClr val="44536B"/>
+                </a:solidFill>
+                <a:latin typeface="Calibri" pitchFamily="34" charset="0"/>
+                <a:ea typeface="Calibri" pitchFamily="34" charset="-122"/>
+                <a:cs typeface="Calibri" pitchFamily="34" charset="-120"/>
+              </a:rPr>
+              <a:t>dry the filament; tighten retraction distance/speed</a:t>
+            </a:r>
+            <a:endParaRPr lang="en-US" sz="980" dirty="0"/>
+          </a:p>
+        </p:txBody>
+      </p:sp>
+      <p:sp>
+        <p:nvSpPr>
+          <p:cNvPr id="19" name="Shape 15"/>
+          <p:cNvSpPr/>
+          <p:nvPr/>
+        </p:nvSpPr>
+        <p:spPr>
+          <a:xfrm>
+            <a:off x="6217920" y="3977640"/>
+            <a:ext cx="2628900" cy="2423160"/>
           </a:xfrm>
           <a:prstGeom prst="roundRect">
             <a:avLst>
-              <a:gd name="adj" fmla="val 2456"/>
+              <a:gd name="adj" fmla="val 2642"/>
             </a:avLst>
           </a:prstGeom>
           <a:solidFill>
@@ -46897,7 +46696,7 @@
       </p:sp>
       <p:pic>
         <p:nvPicPr>
-          <p:cNvPr id="12" name="Image 2" descr="/tmp/mech151_deck/images/36_tool_deflection.png">    </p:cNvPr>
+          <p:cNvPr id="20" name="Image 2" descr="/tmp/mech151_deck/images/33_warping.png">    </p:cNvPr>
           <p:cNvPicPr>
             <a:picLocks noChangeAspect="1"/>
           </p:cNvPicPr>
@@ -46911,8 +46710,8 @@
         </p:blipFill>
         <p:spPr>
           <a:xfrm>
-            <a:off x="8581962" y="1851660"/>
-            <a:ext cx="2663316" cy="2468880"/>
+            <a:off x="6355080" y="4134704"/>
+            <a:ext cx="2354580" cy="902024"/>
           </a:xfrm>
           <a:prstGeom prst="rect">
             <a:avLst/>
@@ -46921,57 +46720,158 @@
       </p:pic>
       <p:sp>
         <p:nvSpPr>
-          <p:cNvPr id="13" name="Text 8"/>
-          <p:cNvSpPr txBox="1"/>
-          <p:nvPr/>
-        </p:nvSpPr>
-        <p:spPr>
-          <a:xfrm>
-            <a:off x="502920" y="4517136"/>
-            <a:ext cx="11201400" cy="219456"/>
-          </a:xfrm>
-          <a:prstGeom prst="rect">
-            <a:avLst/>
-          </a:prstGeom>
-          <a:noFill/>
-          <a:ln/>
-        </p:spPr>
-        <p:txBody>
-          <a:bodyPr wrap="square" lIns="0" tIns="0" rIns="0" bIns="0" rtlCol="0" anchor="ctr"/>
+          <p:cNvPr id="21" name="Text 16"/>
+          <p:cNvSpPr txBox="1"/>
+          <p:nvPr/>
+        </p:nvSpPr>
+        <p:spPr>
+          <a:xfrm>
+            <a:off x="6355080" y="5120640"/>
+            <a:ext cx="2354580" cy="237744"/>
+          </a:xfrm>
+          <a:prstGeom prst="rect">
+            <a:avLst/>
+          </a:prstGeom>
+          <a:noFill/>
+          <a:ln/>
+        </p:spPr>
+        <p:txBody>
+          <a:bodyPr wrap="square" lIns="0" tIns="0" rIns="0" bIns="0" rtlCol="0" anchor="ctr"/>
+          <a:lstStyle/>
+          <a:p>
+            <a:pPr algn="ctr" indent="0" marL="0">
+              <a:buNone/>
+            </a:pPr>
+            <a:r>
+              <a:rPr lang="en-US" sz="1250" b="1" dirty="0">
+                <a:solidFill>
+                  <a:srgbClr val="D97706"/>
+                </a:solidFill>
+                <a:latin typeface="Cambria" pitchFamily="34" charset="0"/>
+                <a:ea typeface="Cambria" pitchFamily="34" charset="-122"/>
+                <a:cs typeface="Cambria" pitchFamily="34" charset="-120"/>
+              </a:rPr>
+              <a:t>Warping</a:t>
+            </a:r>
+            <a:endParaRPr lang="en-US" sz="1250" dirty="0"/>
+          </a:p>
+        </p:txBody>
+      </p:sp>
+      <p:sp>
+        <p:nvSpPr>
+          <p:cNvPr id="22" name="Text 17"/>
+          <p:cNvSpPr txBox="1"/>
+          <p:nvPr/>
+        </p:nvSpPr>
+        <p:spPr>
+          <a:xfrm>
+            <a:off x="6364224" y="5358384"/>
+            <a:ext cx="2336292" cy="621792"/>
+          </a:xfrm>
+          <a:prstGeom prst="rect">
+            <a:avLst/>
+          </a:prstGeom>
+          <a:noFill/>
+          <a:ln/>
+        </p:spPr>
+        <p:txBody>
+          <a:bodyPr wrap="square" lIns="0" tIns="0" rIns="0" bIns="0" rtlCol="0" anchor="t"/>
+          <a:lstStyle/>
+          <a:p>
+            <a:pPr algn="ctr" indent="0" marL="0">
+              <a:lnSpc>
+                <a:spcPct val="108000"/>
+              </a:lnSpc>
+              <a:buNone/>
+            </a:pPr>
+            <a:r>
+              <a:rPr lang="en-US" sz="980" i="1" dirty="0">
+                <a:solidFill>
+                  <a:srgbClr val="8592A3"/>
+                </a:solidFill>
+                <a:latin typeface="Calibri" pitchFamily="34" charset="0"/>
+                <a:ea typeface="Calibri" pitchFamily="34" charset="-122"/>
+                <a:cs typeface="Calibri" pitchFamily="34" charset="-120"/>
+              </a:rPr>
+              <a:t>outer edges cool and shrink faster than the center, curling corners up</a:t>
+            </a:r>
+            <a:endParaRPr lang="en-US" sz="980" dirty="0"/>
+          </a:p>
+        </p:txBody>
+      </p:sp>
+      <p:sp>
+        <p:nvSpPr>
+          <p:cNvPr id="23" name="Text 18"/>
+          <p:cNvSpPr txBox="1"/>
+          <p:nvPr/>
+        </p:nvSpPr>
+        <p:spPr>
+          <a:xfrm>
+            <a:off x="6364224" y="5797296"/>
+            <a:ext cx="2336292" cy="566928"/>
+          </a:xfrm>
+          <a:prstGeom prst="rect">
+            <a:avLst/>
+          </a:prstGeom>
+          <a:noFill/>
+          <a:ln/>
+        </p:spPr>
+        <p:txBody>
+          <a:bodyPr wrap="square" lIns="0" tIns="0" rIns="0" bIns="0" rtlCol="0" anchor="t"/>
           <a:lstStyle/>
           <a:p>
             <a:pPr indent="0" marL="0">
-              <a:buNone/>
-            </a:pPr>
-            <a:r>
-              <a:rPr lang="en-US" sz="1150" b="1" i="1" dirty="0">
-                <a:solidFill>
-                  <a:srgbClr val="8592A3"/>
-                </a:solidFill>
-                <a:latin typeface="Calibri" pitchFamily="34" charset="0"/>
-                <a:ea typeface="Calibri" pitchFamily="34" charset="-122"/>
-                <a:cs typeface="Calibri" pitchFamily="34" charset="-120"/>
-              </a:rPr>
-              <a:t>Feeds &amp; Speeds</a:t>
-            </a:r>
-            <a:endParaRPr lang="en-US" sz="1150" dirty="0"/>
-          </a:p>
-        </p:txBody>
-      </p:sp>
-      <p:sp>
-        <p:nvSpPr>
-          <p:cNvPr id="14" name="Shape 9"/>
-          <p:cNvSpPr/>
-          <p:nvPr/>
-        </p:nvSpPr>
-        <p:spPr>
-          <a:xfrm>
-            <a:off x="502920" y="4791456"/>
-            <a:ext cx="11201400" cy="1645920"/>
+              <a:lnSpc>
+                <a:spcPct val="108000"/>
+              </a:lnSpc>
+              <a:buNone/>
+            </a:pPr>
+            <a:r>
+              <a:rPr lang="en-US" sz="980" b="1" dirty="0">
+                <a:solidFill>
+                  <a:srgbClr val="1B8A8A"/>
+                </a:solidFill>
+                <a:latin typeface="Calibri" pitchFamily="34" charset="0"/>
+                <a:ea typeface="Calibri" pitchFamily="34" charset="-122"/>
+                <a:cs typeface="Calibri" pitchFamily="34" charset="-120"/>
+              </a:rPr>
+              <a:t>Fix — </a:t>
+            </a:r>
+            <a:pPr indent="0" marL="0">
+              <a:lnSpc>
+                <a:spcPct val="108000"/>
+              </a:lnSpc>
+              <a:buNone/>
+            </a:pPr>
+            <a:r>
+              <a:rPr lang="en-US" sz="980" dirty="0">
+                <a:solidFill>
+                  <a:srgbClr val="44536B"/>
+                </a:solidFill>
+                <a:latin typeface="Calibri" pitchFamily="34" charset="0"/>
+                <a:ea typeface="Calibri" pitchFamily="34" charset="-122"/>
+                <a:cs typeface="Calibri" pitchFamily="34" charset="-120"/>
+              </a:rPr>
+              <a:t>add a brim/raft; enclose the printer or use a heated bed</a:t>
+            </a:r>
+            <a:endParaRPr lang="en-US" sz="980" dirty="0"/>
+          </a:p>
+        </p:txBody>
+      </p:sp>
+      <p:sp>
+        <p:nvSpPr>
+          <p:cNvPr id="24" name="Shape 19"/>
+          <p:cNvSpPr/>
+          <p:nvPr/>
+        </p:nvSpPr>
+        <p:spPr>
+          <a:xfrm>
+            <a:off x="9075420" y="3977640"/>
+            <a:ext cx="2628900" cy="2423160"/>
           </a:xfrm>
           <a:prstGeom prst="roundRect">
             <a:avLst>
-              <a:gd name="adj" fmla="val 3889"/>
+              <a:gd name="adj" fmla="val 2642"/>
             </a:avLst>
           </a:prstGeom>
           <a:solidFill>
@@ -46987,7 +46887,7 @@
       </p:sp>
       <p:pic>
         <p:nvPicPr>
-          <p:cNvPr id="15" name="Image 3" descr="/tmp/mech151_deck/images/37_feeds_speeds.png">    </p:cNvPr>
+          <p:cNvPr id="25" name="Image 3" descr="/tmp/mech151_deck/images/34_delamination.png">    </p:cNvPr>
           <p:cNvPicPr>
             <a:picLocks noChangeAspect="1"/>
           </p:cNvPicPr>
@@ -47001,14 +46901,154 @@
         </p:blipFill>
         <p:spPr>
           <a:xfrm>
-            <a:off x="3888209" y="4860036"/>
-            <a:ext cx="4430822" cy="1508760"/>
+            <a:off x="9213252" y="4105656"/>
+            <a:ext cx="2353235" cy="960120"/>
           </a:xfrm>
           <a:prstGeom prst="rect">
             <a:avLst/>
           </a:prstGeom>
         </p:spPr>
       </p:pic>
+      <p:sp>
+        <p:nvSpPr>
+          <p:cNvPr id="26" name="Text 20"/>
+          <p:cNvSpPr txBox="1"/>
+          <p:nvPr/>
+        </p:nvSpPr>
+        <p:spPr>
+          <a:xfrm>
+            <a:off x="9212580" y="5120640"/>
+            <a:ext cx="2354580" cy="237744"/>
+          </a:xfrm>
+          <a:prstGeom prst="rect">
+            <a:avLst/>
+          </a:prstGeom>
+          <a:noFill/>
+          <a:ln/>
+        </p:spPr>
+        <p:txBody>
+          <a:bodyPr wrap="square" lIns="0" tIns="0" rIns="0" bIns="0" rtlCol="0" anchor="ctr"/>
+          <a:lstStyle/>
+          <a:p>
+            <a:pPr algn="ctr" indent="0" marL="0">
+              <a:buNone/>
+            </a:pPr>
+            <a:r>
+              <a:rPr lang="en-US" sz="1250" b="1" dirty="0">
+                <a:solidFill>
+                  <a:srgbClr val="D97706"/>
+                </a:solidFill>
+                <a:latin typeface="Cambria" pitchFamily="34" charset="0"/>
+                <a:ea typeface="Cambria" pitchFamily="34" charset="-122"/>
+                <a:cs typeface="Cambria" pitchFamily="34" charset="-120"/>
+              </a:rPr>
+              <a:t>Layer Separation</a:t>
+            </a:r>
+            <a:endParaRPr lang="en-US" sz="1250" dirty="0"/>
+          </a:p>
+        </p:txBody>
+      </p:sp>
+      <p:sp>
+        <p:nvSpPr>
+          <p:cNvPr id="27" name="Text 21"/>
+          <p:cNvSpPr txBox="1"/>
+          <p:nvPr/>
+        </p:nvSpPr>
+        <p:spPr>
+          <a:xfrm>
+            <a:off x="9221724" y="5358384"/>
+            <a:ext cx="2336292" cy="621792"/>
+          </a:xfrm>
+          <a:prstGeom prst="rect">
+            <a:avLst/>
+          </a:prstGeom>
+          <a:noFill/>
+          <a:ln/>
+        </p:spPr>
+        <p:txBody>
+          <a:bodyPr wrap="square" lIns="0" tIns="0" rIns="0" bIns="0" rtlCol="0" anchor="t"/>
+          <a:lstStyle/>
+          <a:p>
+            <a:pPr algn="ctr" indent="0" marL="0">
+              <a:lnSpc>
+                <a:spcPct val="108000"/>
+              </a:lnSpc>
+              <a:buNone/>
+            </a:pPr>
+            <a:r>
+              <a:rPr lang="en-US" sz="980" i="1" dirty="0">
+                <a:solidFill>
+                  <a:srgbClr val="8592A3"/>
+                </a:solidFill>
+                <a:latin typeface="Calibri" pitchFamily="34" charset="0"/>
+                <a:ea typeface="Calibri" pitchFamily="34" charset="-122"/>
+                <a:cs typeface="Calibri" pitchFamily="34" charset="-120"/>
+              </a:rPr>
+              <a:t>layers don't fully fuse — often too cold, or cooled by a draft</a:t>
+            </a:r>
+            <a:endParaRPr lang="en-US" sz="980" dirty="0"/>
+          </a:p>
+        </p:txBody>
+      </p:sp>
+      <p:sp>
+        <p:nvSpPr>
+          <p:cNvPr id="28" name="Text 22"/>
+          <p:cNvSpPr txBox="1"/>
+          <p:nvPr/>
+        </p:nvSpPr>
+        <p:spPr>
+          <a:xfrm>
+            <a:off x="9221724" y="5797296"/>
+            <a:ext cx="2336292" cy="566928"/>
+          </a:xfrm>
+          <a:prstGeom prst="rect">
+            <a:avLst/>
+          </a:prstGeom>
+          <a:noFill/>
+          <a:ln/>
+        </p:spPr>
+        <p:txBody>
+          <a:bodyPr wrap="square" lIns="0" tIns="0" rIns="0" bIns="0" rtlCol="0" anchor="t"/>
+          <a:lstStyle/>
+          <a:p>
+            <a:pPr indent="0" marL="0">
+              <a:lnSpc>
+                <a:spcPct val="108000"/>
+              </a:lnSpc>
+              <a:buNone/>
+            </a:pPr>
+            <a:r>
+              <a:rPr lang="en-US" sz="980" b="1" dirty="0">
+                <a:solidFill>
+                  <a:srgbClr val="1B8A8A"/>
+                </a:solidFill>
+                <a:latin typeface="Calibri" pitchFamily="34" charset="0"/>
+                <a:ea typeface="Calibri" pitchFamily="34" charset="-122"/>
+                <a:cs typeface="Calibri" pitchFamily="34" charset="-120"/>
+              </a:rPr>
+              <a:t>Fix — </a:t>
+            </a:r>
+            <a:pPr indent="0" marL="0">
+              <a:lnSpc>
+                <a:spcPct val="108000"/>
+              </a:lnSpc>
+              <a:buNone/>
+            </a:pPr>
+            <a:r>
+              <a:rPr lang="en-US" sz="980" dirty="0">
+                <a:solidFill>
+                  <a:srgbClr val="44536B"/>
+                </a:solidFill>
+                <a:latin typeface="Calibri" pitchFamily="34" charset="0"/>
+                <a:ea typeface="Calibri" pitchFamily="34" charset="-122"/>
+                <a:cs typeface="Calibri" pitchFamily="34" charset="-120"/>
+              </a:rPr>
+              <a:t>raise nozzle temp slightly; shield the print from drafts</a:t>
+            </a:r>
+            <a:endParaRPr lang="en-US" sz="980" dirty="0"/>
+          </a:p>
+        </p:txBody>
+      </p:sp>
     </p:spTree>
   </p:cSld>
   <p:clrMapOvr>
@@ -47135,7 +47175,7 @@
                 <a:ea typeface="Cambria" pitchFamily="34" charset="-122"/>
                 <a:cs typeface="Cambria" pitchFamily="34" charset="-120"/>
               </a:rPr>
-              <a:t>Laser Cutting</a:t>
+              <a:t>Subtractive Manufacturing (CNC)</a:t>
             </a:r>
             <a:endParaRPr lang="en-US" sz="2600" dirty="0"/>
           </a:p>
@@ -47174,7 +47214,7 @@
                 <a:ea typeface="Calibri" pitchFamily="34" charset="-122"/>
                 <a:cs typeface="Calibri" pitchFamily="34" charset="-120"/>
               </a:rPr>
-              <a:t>Cuts flat sheet by burning or vaporizing a narrow line through it — fast and precise in 2D, with its own rules.</a:t>
+              <a:t>Starts with solid stock and cuts material away — design constraints come from the tool and how the part is held.</a:t>
             </a:r>
             <a:endParaRPr lang="en-US" sz="1250" dirty="0"/>
           </a:p>
@@ -47221,203 +47261,167 @@
       </p:sp>
       <p:sp>
         <p:nvSpPr>
-          <p:cNvPr id="7" name="Text 5"/>
-          <p:cNvSpPr txBox="1"/>
-          <p:nvPr/>
-        </p:nvSpPr>
-        <p:spPr>
-          <a:xfrm>
-            <a:off x="502920" y="2011680"/>
-            <a:ext cx="11201400" cy="2743200"/>
-          </a:xfrm>
-          <a:prstGeom prst="rect">
-            <a:avLst/>
-          </a:prstGeom>
-          <a:noFill/>
-          <a:ln/>
-        </p:spPr>
-        <p:txBody>
-          <a:bodyPr wrap="square" lIns="0" tIns="0" rIns="0" bIns="0" rtlCol="0" anchor="t"/>
-          <a:lstStyle/>
-          <a:p>
-            <a:pPr marL="342900" indent="-342900">
-              <a:buSzPct val="100000"/>
-              <a:buChar char="●"/>
-            </a:pPr>
-            <a:r>
-              <a:rPr lang="en-US" sz="1350" b="1" dirty="0">
-                <a:solidFill>
-                  <a:srgbClr val="0F2942"/>
-                </a:solidFill>
-                <a:latin typeface="Calibri" pitchFamily="34" charset="0"/>
-                <a:ea typeface="Calibri" pitchFamily="34" charset="-122"/>
-                <a:cs typeface="Calibri" pitchFamily="34" charset="-120"/>
-              </a:rPr>
-              <a:t>Kerf — </a:t>
-            </a:r>
-            <a:pPr indent="0" marL="0">
-              <a:spcAft>
-                <a:spcPts val="800"/>
-              </a:spcAft>
-              <a:buNone/>
-            </a:pPr>
-            <a:r>
-              <a:rPr lang="en-US" sz="1350" dirty="0">
-                <a:solidFill>
-                  <a:srgbClr val="44536B"/>
-                </a:solidFill>
-                <a:latin typeface="Calibri" pitchFamily="34" charset="0"/>
-                <a:ea typeface="Calibri" pitchFamily="34" charset="-122"/>
-                <a:cs typeface="Calibri" pitchFamily="34" charset="-120"/>
-              </a:rPr>
-              <a:t>the cut removes a finite width of material — account for it on tight-fitting parts</a:t>
-            </a:r>
-            <a:endParaRPr lang="en-US" sz="1350" dirty="0"/>
-          </a:p>
-          <a:p>
-            <a:pPr marL="342900" indent="-342900">
-              <a:buSzPct val="100000"/>
-              <a:buChar char="●"/>
-            </a:pPr>
-            <a:r>
-              <a:rPr lang="en-US" sz="1350" b="1" dirty="0">
-                <a:solidFill>
-                  <a:srgbClr val="0F2942"/>
-                </a:solidFill>
-                <a:latin typeface="Calibri" pitchFamily="34" charset="0"/>
-                <a:ea typeface="Calibri" pitchFamily="34" charset="-122"/>
-                <a:cs typeface="Calibri" pitchFamily="34" charset="-120"/>
-              </a:rPr>
-              <a:t>Vector cut vs. raster engrave — </a:t>
-            </a:r>
-            <a:pPr indent="0" marL="0">
-              <a:spcAft>
-                <a:spcPts val="800"/>
-              </a:spcAft>
-              <a:buNone/>
-            </a:pPr>
-            <a:r>
-              <a:rPr lang="en-US" sz="1350" dirty="0">
-                <a:solidFill>
-                  <a:srgbClr val="44536B"/>
-                </a:solidFill>
-                <a:latin typeface="Calibri" pitchFamily="34" charset="0"/>
-                <a:ea typeface="Calibri" pitchFamily="34" charset="-122"/>
-                <a:cs typeface="Calibri" pitchFamily="34" charset="-120"/>
-              </a:rPr>
-              <a:t>line color/layer determines whether the laser cuts through or marks the surface</a:t>
-            </a:r>
-            <a:endParaRPr lang="en-US" sz="1350" dirty="0"/>
-          </a:p>
-          <a:p>
-            <a:pPr marL="342900" indent="-342900">
-              <a:buSzPct val="100000"/>
-              <a:buChar char="●"/>
-            </a:pPr>
-            <a:r>
-              <a:rPr lang="en-US" sz="1350" b="1" dirty="0">
-                <a:solidFill>
-                  <a:srgbClr val="0F2942"/>
-                </a:solidFill>
-                <a:latin typeface="Calibri" pitchFamily="34" charset="0"/>
-                <a:ea typeface="Calibri" pitchFamily="34" charset="-122"/>
-                <a:cs typeface="Calibri" pitchFamily="34" charset="-120"/>
-              </a:rPr>
-              <a:t>Material limits — </a:t>
-            </a:r>
-            <a:pPr indent="0" marL="0">
-              <a:spcAft>
-                <a:spcPts val="800"/>
-              </a:spcAft>
-              <a:buNone/>
-            </a:pPr>
-            <a:r>
-              <a:rPr lang="en-US" sz="1350" dirty="0">
-                <a:solidFill>
-                  <a:srgbClr val="44536B"/>
-                </a:solidFill>
-                <a:latin typeface="Calibri" pitchFamily="34" charset="0"/>
-                <a:ea typeface="Calibri" pitchFamily="34" charset="-122"/>
-                <a:cs typeface="Calibri" pitchFamily="34" charset="-120"/>
-              </a:rPr>
-              <a:t>wood, acrylic, paper, and cloth cut well</a:t>
-            </a:r>
-            <a:endParaRPr lang="en-US" sz="1350" dirty="0"/>
-          </a:p>
-          <a:p>
-            <a:pPr marL="342900" indent="-342900">
-              <a:buSzPct val="100000"/>
-              <a:buChar char="●"/>
-            </a:pPr>
-            <a:r>
-              <a:rPr lang="en-US" sz="1350" b="1" dirty="0">
-                <a:solidFill>
-                  <a:srgbClr val="0F2942"/>
-                </a:solidFill>
-                <a:latin typeface="Calibri" pitchFamily="34" charset="0"/>
-                <a:ea typeface="Calibri" pitchFamily="34" charset="-122"/>
-                <a:cs typeface="Calibri" pitchFamily="34" charset="-120"/>
-              </a:rPr>
-              <a:t>Small-feature limits — </a:t>
-            </a:r>
-            <a:pPr indent="0" marL="0">
-              <a:spcAft>
-                <a:spcPts val="800"/>
-              </a:spcAft>
-              <a:buNone/>
-            </a:pPr>
-            <a:r>
-              <a:rPr lang="en-US" sz="1350" dirty="0">
-                <a:solidFill>
-                  <a:srgbClr val="44536B"/>
-                </a:solidFill>
-                <a:latin typeface="Calibri" pitchFamily="34" charset="0"/>
-                <a:ea typeface="Calibri" pitchFamily="34" charset="-122"/>
-                <a:cs typeface="Calibri" pitchFamily="34" charset="-120"/>
-              </a:rPr>
-              <a:t>minimum hole size and spacing relative to material thickness</a:t>
-            </a:r>
-            <a:endParaRPr lang="en-US" sz="1350" dirty="0"/>
-          </a:p>
-        </p:txBody>
-      </p:sp>
-      <p:sp>
-        <p:nvSpPr>
-          <p:cNvPr id="8" name="Shape 6"/>
-          <p:cNvSpPr/>
-          <p:nvPr/>
-        </p:nvSpPr>
-        <p:spPr>
-          <a:xfrm>
-            <a:off x="502920" y="4892040"/>
-            <a:ext cx="11201400" cy="685800"/>
+          <p:cNvPr id="7" name="Shape 5"/>
+          <p:cNvSpPr/>
+          <p:nvPr/>
+        </p:nvSpPr>
+        <p:spPr>
+          <a:xfrm>
+            <a:off x="502920" y="1783080"/>
+            <a:ext cx="3581400" cy="2606040"/>
           </a:xfrm>
           <a:prstGeom prst="roundRect">
             <a:avLst>
-              <a:gd name="adj" fmla="val 10667"/>
+              <a:gd name="adj" fmla="val 2456"/>
             </a:avLst>
           </a:prstGeom>
           <a:solidFill>
             <a:srgbClr val="F3F6F9"/>
           </a:solidFill>
-          <a:ln w="15875">
+          <a:ln w="12700">
             <a:solidFill>
-              <a:srgbClr val="C0392B"/>
+              <a:srgbClr val="E1E7EE"/>
             </a:solidFill>
             <a:prstDash val="solid"/>
           </a:ln>
         </p:spPr>
       </p:sp>
-      <p:sp>
-        <p:nvSpPr>
-          <p:cNvPr id="9" name="Text 7"/>
-          <p:cNvSpPr txBox="1"/>
-          <p:nvPr/>
-        </p:nvSpPr>
-        <p:spPr>
-          <a:xfrm>
-            <a:off x="731520" y="5001768"/>
-            <a:ext cx="10744200" cy="466344"/>
+      <p:pic>
+        <p:nvPicPr>
+          <p:cNvPr id="8" name="Image 0" descr="/tmp/mech151_deck/images/38_workholding.png">    </p:cNvPr>
+          <p:cNvPicPr>
+            <a:picLocks noChangeAspect="1"/>
+          </p:cNvPicPr>
+          <p:nvPr/>
+        </p:nvPicPr>
+        <p:blipFill>
+          <a:blip r:embed="rId1"/>
+          <a:stretch>
+            <a:fillRect/>
+          </a:stretch>
+        </p:blipFill>
+        <p:spPr>
+          <a:xfrm>
+            <a:off x="640080" y="2058927"/>
+            <a:ext cx="3307080" cy="2054346"/>
+          </a:xfrm>
+          <a:prstGeom prst="rect">
+            <a:avLst/>
+          </a:prstGeom>
+        </p:spPr>
+      </p:pic>
+      <p:sp>
+        <p:nvSpPr>
+          <p:cNvPr id="9" name="Shape 6"/>
+          <p:cNvSpPr/>
+          <p:nvPr/>
+        </p:nvSpPr>
+        <p:spPr>
+          <a:xfrm>
+            <a:off x="4312920" y="1783080"/>
+            <a:ext cx="3581400" cy="2606040"/>
+          </a:xfrm>
+          <a:prstGeom prst="roundRect">
+            <a:avLst>
+              <a:gd name="adj" fmla="val 2456"/>
+            </a:avLst>
+          </a:prstGeom>
+          <a:solidFill>
+            <a:srgbClr val="F3F6F9"/>
+          </a:solidFill>
+          <a:ln w="12700">
+            <a:solidFill>
+              <a:srgbClr val="E1E7EE"/>
+            </a:solidFill>
+            <a:prstDash val="solid"/>
+          </a:ln>
+        </p:spPr>
+      </p:sp>
+      <p:pic>
+        <p:nvPicPr>
+          <p:cNvPr id="10" name="Image 1" descr="/tmp/mech151_deck/images/35_tool_corner.png">    </p:cNvPr>
+          <p:cNvPicPr>
+            <a:picLocks noChangeAspect="1"/>
+          </p:cNvPicPr>
+          <p:nvPr/>
+        </p:nvPicPr>
+        <p:blipFill>
+          <a:blip r:embed="rId2"/>
+          <a:stretch>
+            <a:fillRect/>
+          </a:stretch>
+        </p:blipFill>
+        <p:spPr>
+          <a:xfrm>
+            <a:off x="4450080" y="1857093"/>
+            <a:ext cx="3307080" cy="2458013"/>
+          </a:xfrm>
+          <a:prstGeom prst="rect">
+            <a:avLst/>
+          </a:prstGeom>
+        </p:spPr>
+      </p:pic>
+      <p:sp>
+        <p:nvSpPr>
+          <p:cNvPr id="11" name="Shape 7"/>
+          <p:cNvSpPr/>
+          <p:nvPr/>
+        </p:nvSpPr>
+        <p:spPr>
+          <a:xfrm>
+            <a:off x="8122920" y="1783080"/>
+            <a:ext cx="3581400" cy="2606040"/>
+          </a:xfrm>
+          <a:prstGeom prst="roundRect">
+            <a:avLst>
+              <a:gd name="adj" fmla="val 2456"/>
+            </a:avLst>
+          </a:prstGeom>
+          <a:solidFill>
+            <a:srgbClr val="F3F6F9"/>
+          </a:solidFill>
+          <a:ln w="12700">
+            <a:solidFill>
+              <a:srgbClr val="E1E7EE"/>
+            </a:solidFill>
+            <a:prstDash val="solid"/>
+          </a:ln>
+        </p:spPr>
+      </p:sp>
+      <p:pic>
+        <p:nvPicPr>
+          <p:cNvPr id="12" name="Image 2" descr="/tmp/mech151_deck/images/36_tool_deflection.png">    </p:cNvPr>
+          <p:cNvPicPr>
+            <a:picLocks noChangeAspect="1"/>
+          </p:cNvPicPr>
+          <p:nvPr/>
+        </p:nvPicPr>
+        <p:blipFill>
+          <a:blip r:embed="rId3"/>
+          <a:stretch>
+            <a:fillRect/>
+          </a:stretch>
+        </p:blipFill>
+        <p:spPr>
+          <a:xfrm>
+            <a:off x="8698603" y="1851660"/>
+            <a:ext cx="2430034" cy="2468880"/>
+          </a:xfrm>
+          <a:prstGeom prst="rect">
+            <a:avLst/>
+          </a:prstGeom>
+        </p:spPr>
+      </p:pic>
+      <p:sp>
+        <p:nvSpPr>
+          <p:cNvPr id="13" name="Text 8"/>
+          <p:cNvSpPr txBox="1"/>
+          <p:nvPr/>
+        </p:nvSpPr>
+        <p:spPr>
+          <a:xfrm>
+            <a:off x="502920" y="4517136"/>
+            <a:ext cx="11201400" cy="219456"/>
           </a:xfrm>
           <a:prstGeom prst="rect">
             <a:avLst/>
@@ -47430,43 +47434,74 @@
           <a:lstStyle/>
           <a:p>
             <a:pPr indent="0" marL="0">
-              <a:lnSpc>
-                <a:spcPct val="115000"/>
-              </a:lnSpc>
-              <a:buNone/>
-            </a:pPr>
-            <a:r>
-              <a:rPr lang="en-US" sz="1250" b="1" dirty="0">
-                <a:solidFill>
-                  <a:srgbClr val="C0392B"/>
-                </a:solidFill>
-                <a:latin typeface="Calibri" pitchFamily="34" charset="0"/>
-                <a:ea typeface="Calibri" pitchFamily="34" charset="-122"/>
-                <a:cs typeface="Calibri" pitchFamily="34" charset="-120"/>
-              </a:rPr>
-              <a:t>Never cut:  </a:t>
-            </a:r>
-            <a:pPr indent="0" marL="0">
-              <a:lnSpc>
-                <a:spcPct val="115000"/>
-              </a:lnSpc>
-              <a:buNone/>
-            </a:pPr>
-            <a:r>
-              <a:rPr lang="en-US" sz="1250" dirty="0">
-                <a:solidFill>
-                  <a:srgbClr val="44536B"/>
-                </a:solidFill>
-                <a:latin typeface="Calibri" pitchFamily="34" charset="0"/>
-                <a:ea typeface="Calibri" pitchFamily="34" charset="-122"/>
-                <a:cs typeface="Calibri" pitchFamily="34" charset="-120"/>
-              </a:rPr>
-              <a:t>PVC and other chlorinated plastics must never be cut on a laser — they release chlorine gas.</a:t>
-            </a:r>
-            <a:endParaRPr lang="en-US" sz="1250" dirty="0"/>
-          </a:p>
-        </p:txBody>
-      </p:sp>
+              <a:buNone/>
+            </a:pPr>
+            <a:r>
+              <a:rPr lang="en-US" sz="1150" b="1" i="1" dirty="0">
+                <a:solidFill>
+                  <a:srgbClr val="8592A3"/>
+                </a:solidFill>
+                <a:latin typeface="Calibri" pitchFamily="34" charset="0"/>
+                <a:ea typeface="Calibri" pitchFamily="34" charset="-122"/>
+                <a:cs typeface="Calibri" pitchFamily="34" charset="-120"/>
+              </a:rPr>
+              <a:t>Feeds &amp; Speeds</a:t>
+            </a:r>
+            <a:endParaRPr lang="en-US" sz="1150" dirty="0"/>
+          </a:p>
+        </p:txBody>
+      </p:sp>
+      <p:sp>
+        <p:nvSpPr>
+          <p:cNvPr id="14" name="Shape 9"/>
+          <p:cNvSpPr/>
+          <p:nvPr/>
+        </p:nvSpPr>
+        <p:spPr>
+          <a:xfrm>
+            <a:off x="502920" y="4791456"/>
+            <a:ext cx="11201400" cy="1645920"/>
+          </a:xfrm>
+          <a:prstGeom prst="roundRect">
+            <a:avLst>
+              <a:gd name="adj" fmla="val 3889"/>
+            </a:avLst>
+          </a:prstGeom>
+          <a:solidFill>
+            <a:srgbClr val="F3F6F9"/>
+          </a:solidFill>
+          <a:ln w="12700">
+            <a:solidFill>
+              <a:srgbClr val="E1E7EE"/>
+            </a:solidFill>
+            <a:prstDash val="solid"/>
+          </a:ln>
+        </p:spPr>
+      </p:sp>
+      <p:pic>
+        <p:nvPicPr>
+          <p:cNvPr id="15" name="Image 3" descr="/tmp/mech151_deck/images/37_feeds_speeds.png">    </p:cNvPr>
+          <p:cNvPicPr>
+            <a:picLocks noChangeAspect="1"/>
+          </p:cNvPicPr>
+          <p:nvPr/>
+        </p:nvPicPr>
+        <p:blipFill>
+          <a:blip r:embed="rId4"/>
+          <a:stretch>
+            <a:fillRect/>
+          </a:stretch>
+        </p:blipFill>
+        <p:spPr>
+          <a:xfrm>
+            <a:off x="3519061" y="4860036"/>
+            <a:ext cx="5169117" cy="1508760"/>
+          </a:xfrm>
+          <a:prstGeom prst="rect">
+            <a:avLst/>
+          </a:prstGeom>
+        </p:spPr>
+      </p:pic>
     </p:spTree>
   </p:cSld>
   <p:clrMapOvr>
@@ -47593,7 +47628,7 @@
                 <a:ea typeface="Cambria" pitchFamily="34" charset="-122"/>
                 <a:cs typeface="Cambria" pitchFamily="34" charset="-120"/>
               </a:rPr>
-              <a:t>DFM Design Considerations</a:t>
+              <a:t>Laser Cutting</a:t>
             </a:r>
             <a:endParaRPr lang="en-US" sz="2600" dirty="0"/>
           </a:p>
@@ -47632,7 +47667,7 @@
                 <a:ea typeface="Calibri" pitchFamily="34" charset="-122"/>
                 <a:cs typeface="Calibri" pitchFamily="34" charset="-120"/>
               </a:rPr>
-              <a:t>Shape the part so the chosen process can make it well, at reasonable cost, without special effort.</a:t>
+              <a:t>Cuts flat sheet by burning or vaporizing a narrow line through it — fast and precise in 2D, with its own rules.</a:t>
             </a:r>
             <a:endParaRPr lang="en-US" sz="1250" dirty="0"/>
           </a:p>
@@ -47679,18 +47714,145 @@
       </p:sp>
       <p:sp>
         <p:nvSpPr>
-          <p:cNvPr id="7" name="Shape 5"/>
-          <p:cNvSpPr/>
-          <p:nvPr/>
-        </p:nvSpPr>
-        <p:spPr>
-          <a:xfrm>
-            <a:off x="502920" y="2057400"/>
-            <a:ext cx="3563112" cy="1911096"/>
+          <p:cNvPr id="7" name="Text 5"/>
+          <p:cNvSpPr txBox="1"/>
+          <p:nvPr/>
+        </p:nvSpPr>
+        <p:spPr>
+          <a:xfrm>
+            <a:off x="502920" y="1783080"/>
+            <a:ext cx="11201400" cy="868680"/>
+          </a:xfrm>
+          <a:prstGeom prst="rect">
+            <a:avLst/>
+          </a:prstGeom>
+          <a:noFill/>
+          <a:ln/>
+        </p:spPr>
+        <p:txBody>
+          <a:bodyPr wrap="square" lIns="0" tIns="0" rIns="0" bIns="0" rtlCol="0" anchor="t"/>
+          <a:lstStyle/>
+          <a:p>
+            <a:pPr marL="342900" indent="-342900">
+              <a:buSzPct val="100000"/>
+              <a:buChar char="●"/>
+            </a:pPr>
+            <a:r>
+              <a:rPr lang="en-US" sz="1250" b="1" dirty="0">
+                <a:solidFill>
+                  <a:srgbClr val="0F2942"/>
+                </a:solidFill>
+                <a:latin typeface="Calibri" pitchFamily="34" charset="0"/>
+                <a:ea typeface="Calibri" pitchFamily="34" charset="-122"/>
+                <a:cs typeface="Calibri" pitchFamily="34" charset="-120"/>
+              </a:rPr>
+              <a:t>Kerf — </a:t>
+            </a:r>
+            <a:pPr indent="0" marL="0">
+              <a:spcAft>
+                <a:spcPts val="800"/>
+              </a:spcAft>
+              <a:buNone/>
+            </a:pPr>
+            <a:r>
+              <a:rPr lang="en-US" sz="1250" dirty="0">
+                <a:solidFill>
+                  <a:srgbClr val="44536B"/>
+                </a:solidFill>
+                <a:latin typeface="Calibri" pitchFamily="34" charset="0"/>
+                <a:ea typeface="Calibri" pitchFamily="34" charset="-122"/>
+                <a:cs typeface="Calibri" pitchFamily="34" charset="-120"/>
+              </a:rPr>
+              <a:t>the cut removes a finite width of material — account for it on tight-fitting parts</a:t>
+            </a:r>
+            <a:endParaRPr lang="en-US" sz="1250" dirty="0"/>
+          </a:p>
+          <a:p>
+            <a:pPr marL="342900" indent="-342900">
+              <a:buSzPct val="100000"/>
+              <a:buChar char="●"/>
+            </a:pPr>
+            <a:r>
+              <a:rPr lang="en-US" sz="1250" b="1" dirty="0">
+                <a:solidFill>
+                  <a:srgbClr val="0F2942"/>
+                </a:solidFill>
+                <a:latin typeface="Calibri" pitchFamily="34" charset="0"/>
+                <a:ea typeface="Calibri" pitchFamily="34" charset="-122"/>
+                <a:cs typeface="Calibri" pitchFamily="34" charset="-120"/>
+              </a:rPr>
+              <a:t>Material limits — </a:t>
+            </a:r>
+            <a:pPr indent="0" marL="0">
+              <a:spcAft>
+                <a:spcPts val="800"/>
+              </a:spcAft>
+              <a:buNone/>
+            </a:pPr>
+            <a:r>
+              <a:rPr lang="en-US" sz="1250" dirty="0">
+                <a:solidFill>
+                  <a:srgbClr val="44536B"/>
+                </a:solidFill>
+                <a:latin typeface="Calibri" pitchFamily="34" charset="0"/>
+                <a:ea typeface="Calibri" pitchFamily="34" charset="-122"/>
+                <a:cs typeface="Calibri" pitchFamily="34" charset="-120"/>
+              </a:rPr>
+              <a:t>wood, acrylic, paper, and cloth cut well</a:t>
+            </a:r>
+            <a:endParaRPr lang="en-US" sz="1250" dirty="0"/>
+          </a:p>
+          <a:p>
+            <a:pPr marL="342900" indent="-342900">
+              <a:buSzPct val="100000"/>
+              <a:buChar char="●"/>
+            </a:pPr>
+            <a:r>
+              <a:rPr lang="en-US" sz="1250" b="1" dirty="0">
+                <a:solidFill>
+                  <a:srgbClr val="0F2942"/>
+                </a:solidFill>
+                <a:latin typeface="Calibri" pitchFamily="34" charset="0"/>
+                <a:ea typeface="Calibri" pitchFamily="34" charset="-122"/>
+                <a:cs typeface="Calibri" pitchFamily="34" charset="-120"/>
+              </a:rPr>
+              <a:t>Small-feature limits — </a:t>
+            </a:r>
+            <a:pPr indent="0" marL="0">
+              <a:spcAft>
+                <a:spcPts val="800"/>
+              </a:spcAft>
+              <a:buNone/>
+            </a:pPr>
+            <a:r>
+              <a:rPr lang="en-US" sz="1250" dirty="0">
+                <a:solidFill>
+                  <a:srgbClr val="44536B"/>
+                </a:solidFill>
+                <a:latin typeface="Calibri" pitchFamily="34" charset="0"/>
+                <a:ea typeface="Calibri" pitchFamily="34" charset="-122"/>
+                <a:cs typeface="Calibri" pitchFamily="34" charset="-120"/>
+              </a:rPr>
+              <a:t>minimum hole size and spacing relative to material thickness</a:t>
+            </a:r>
+            <a:endParaRPr lang="en-US" sz="1250" dirty="0"/>
+          </a:p>
+        </p:txBody>
+      </p:sp>
+      <p:sp>
+        <p:nvSpPr>
+          <p:cNvPr id="8" name="Shape 6"/>
+          <p:cNvSpPr/>
+          <p:nvPr/>
+        </p:nvSpPr>
+        <p:spPr>
+          <a:xfrm>
+            <a:off x="502920" y="2697480"/>
+            <a:ext cx="5486400" cy="2880360"/>
           </a:xfrm>
           <a:prstGeom prst="roundRect">
             <a:avLst>
-              <a:gd name="adj" fmla="val 3828"/>
+              <a:gd name="adj" fmla="val 2222"/>
             </a:avLst>
           </a:prstGeom>
           <a:solidFill>
@@ -47704,160 +47866,44 @@
           </a:ln>
         </p:spPr>
       </p:sp>
-      <p:sp>
-        <p:nvSpPr>
-          <p:cNvPr id="8" name="Shape 6"/>
-          <p:cNvSpPr/>
-          <p:nvPr/>
-        </p:nvSpPr>
-        <p:spPr>
-          <a:xfrm>
-            <a:off x="667512" y="2203704"/>
-            <a:ext cx="384048" cy="384048"/>
-          </a:xfrm>
-          <a:prstGeom prst="ellipse">
-            <a:avLst/>
-          </a:prstGeom>
-          <a:solidFill>
-            <a:srgbClr val="D97706"/>
-          </a:solidFill>
-          <a:ln/>
-        </p:spPr>
-      </p:sp>
-      <p:sp>
-        <p:nvSpPr>
-          <p:cNvPr id="9" name="Text 7"/>
-          <p:cNvSpPr txBox="1"/>
-          <p:nvPr/>
-        </p:nvSpPr>
-        <p:spPr>
-          <a:xfrm>
-            <a:off x="667512" y="2203704"/>
-            <a:ext cx="384048" cy="384048"/>
-          </a:xfrm>
-          <a:prstGeom prst="rect">
-            <a:avLst/>
-          </a:prstGeom>
-          <a:noFill/>
-          <a:ln/>
-        </p:spPr>
-        <p:txBody>
-          <a:bodyPr wrap="square" lIns="0" tIns="0" rIns="0" bIns="0" rtlCol="0" anchor="ctr"/>
-          <a:lstStyle/>
-          <a:p>
-            <a:pPr algn="ctr" indent="0" marL="0">
-              <a:buNone/>
-            </a:pPr>
-            <a:r>
-              <a:rPr lang="en-US" sz="1500" b="1" dirty="0">
-                <a:solidFill>
-                  <a:srgbClr val="FFFFFF"/>
-                </a:solidFill>
-                <a:latin typeface="Calibri" pitchFamily="34" charset="0"/>
-                <a:ea typeface="Calibri" pitchFamily="34" charset="-122"/>
-                <a:cs typeface="Calibri" pitchFamily="34" charset="-120"/>
-              </a:rPr>
-              <a:t>1</a:t>
-            </a:r>
-            <a:endParaRPr lang="en-US" sz="1500" dirty="0"/>
-          </a:p>
-        </p:txBody>
-      </p:sp>
-      <p:sp>
-        <p:nvSpPr>
-          <p:cNvPr id="10" name="Text 8"/>
-          <p:cNvSpPr txBox="1"/>
-          <p:nvPr/>
-        </p:nvSpPr>
-        <p:spPr>
-          <a:xfrm>
-            <a:off x="1161288" y="2167128"/>
-            <a:ext cx="2740152" cy="457200"/>
-          </a:xfrm>
-          <a:prstGeom prst="rect">
-            <a:avLst/>
-          </a:prstGeom>
-          <a:noFill/>
-          <a:ln/>
-        </p:spPr>
-        <p:txBody>
-          <a:bodyPr wrap="square" lIns="0" tIns="0" rIns="0" bIns="0" rtlCol="0" anchor="t"/>
-          <a:lstStyle/>
-          <a:p>
-            <a:pPr indent="0" marL="0">
-              <a:buNone/>
-            </a:pPr>
-            <a:r>
-              <a:rPr lang="en-US" sz="1300" b="1" dirty="0">
-                <a:solidFill>
-                  <a:srgbClr val="0F2942"/>
-                </a:solidFill>
-                <a:latin typeface="Calibri" pitchFamily="34" charset="0"/>
-                <a:ea typeface="Calibri" pitchFamily="34" charset="-122"/>
-                <a:cs typeface="Calibri" pitchFamily="34" charset="-120"/>
-              </a:rPr>
-              <a:t>Match design to process</a:t>
-            </a:r>
-            <a:endParaRPr lang="en-US" sz="1300" dirty="0"/>
-          </a:p>
-        </p:txBody>
-      </p:sp>
-      <p:sp>
-        <p:nvSpPr>
-          <p:cNvPr id="11" name="Text 9"/>
-          <p:cNvSpPr txBox="1"/>
-          <p:nvPr/>
-        </p:nvSpPr>
-        <p:spPr>
-          <a:xfrm>
-            <a:off x="667512" y="2624328"/>
-            <a:ext cx="3233928" cy="1252728"/>
-          </a:xfrm>
-          <a:prstGeom prst="rect">
-            <a:avLst/>
-          </a:prstGeom>
-          <a:noFill/>
-          <a:ln/>
-        </p:spPr>
-        <p:txBody>
-          <a:bodyPr wrap="square" lIns="0" tIns="0" rIns="0" bIns="0" rtlCol="0" anchor="t"/>
-          <a:lstStyle/>
-          <a:p>
-            <a:pPr indent="0" marL="0">
-              <a:lnSpc>
-                <a:spcPct val="105000"/>
-              </a:lnSpc>
-              <a:buNone/>
-            </a:pPr>
-            <a:r>
-              <a:rPr lang="en-US" sz="1150" dirty="0">
-                <a:solidFill>
-                  <a:srgbClr val="44536B"/>
-                </a:solidFill>
-                <a:latin typeface="Calibri" pitchFamily="34" charset="0"/>
-                <a:ea typeface="Calibri" pitchFamily="34" charset="-122"/>
-                <a:cs typeface="Calibri" pitchFamily="34" charset="-120"/>
-              </a:rPr>
-              <a:t>uniform walls for printing/casting, generous radii for machining, flat unfolded geometry for laser</a:t>
-            </a:r>
-            <a:endParaRPr lang="en-US" sz="1150" dirty="0"/>
-          </a:p>
-        </p:txBody>
-      </p:sp>
-      <p:sp>
-        <p:nvSpPr>
-          <p:cNvPr id="12" name="Shape 10"/>
-          <p:cNvSpPr/>
-          <p:nvPr/>
-        </p:nvSpPr>
-        <p:spPr>
-          <a:xfrm>
-            <a:off x="4322064" y="2057400"/>
-            <a:ext cx="3563112" cy="1911096"/>
+      <p:pic>
+        <p:nvPicPr>
+          <p:cNvPr id="9" name="Image 0" descr="/tmp/mech151_deck/images/39_vector_raster.png">    </p:cNvPr>
+          <p:cNvPicPr>
+            <a:picLocks noChangeAspect="1"/>
+          </p:cNvPicPr>
+          <p:nvPr/>
+        </p:nvPicPr>
+        <p:blipFill>
+          <a:blip r:embed="rId1"/>
+          <a:stretch>
+            <a:fillRect/>
+          </a:stretch>
+        </p:blipFill>
+        <p:spPr>
+          <a:xfrm>
+            <a:off x="1133482" y="2766060"/>
+            <a:ext cx="4225276" cy="2743200"/>
+          </a:xfrm>
+          <a:prstGeom prst="rect">
+            <a:avLst/>
+          </a:prstGeom>
+        </p:spPr>
+      </p:pic>
+      <p:sp>
+        <p:nvSpPr>
+          <p:cNvPr id="10" name="Shape 7"/>
+          <p:cNvSpPr/>
+          <p:nvPr/>
+        </p:nvSpPr>
+        <p:spPr>
+          <a:xfrm>
+            <a:off x="6217920" y="2697480"/>
+            <a:ext cx="5486400" cy="2880360"/>
           </a:xfrm>
           <a:prstGeom prst="roundRect">
             <a:avLst>
-              <a:gd name="adj" fmla="val 3828"/>
+              <a:gd name="adj" fmla="val 2222"/>
             </a:avLst>
           </a:prstGeom>
           <a:solidFill>
@@ -47871,168 +47917,52 @@
           </a:ln>
         </p:spPr>
       </p:sp>
-      <p:sp>
-        <p:nvSpPr>
-          <p:cNvPr id="13" name="Shape 11"/>
-          <p:cNvSpPr/>
-          <p:nvPr/>
-        </p:nvSpPr>
-        <p:spPr>
-          <a:xfrm>
-            <a:off x="4486656" y="2203704"/>
-            <a:ext cx="384048" cy="384048"/>
-          </a:xfrm>
-          <a:prstGeom prst="ellipse">
-            <a:avLst/>
-          </a:prstGeom>
-          <a:solidFill>
-            <a:srgbClr val="D97706"/>
-          </a:solidFill>
-          <a:ln/>
-        </p:spPr>
-      </p:sp>
-      <p:sp>
-        <p:nvSpPr>
-          <p:cNvPr id="14" name="Text 12"/>
-          <p:cNvSpPr txBox="1"/>
-          <p:nvPr/>
-        </p:nvSpPr>
-        <p:spPr>
-          <a:xfrm>
-            <a:off x="4486656" y="2203704"/>
-            <a:ext cx="384048" cy="384048"/>
-          </a:xfrm>
-          <a:prstGeom prst="rect">
-            <a:avLst/>
-          </a:prstGeom>
-          <a:noFill/>
-          <a:ln/>
-        </p:spPr>
-        <p:txBody>
-          <a:bodyPr wrap="square" lIns="0" tIns="0" rIns="0" bIns="0" rtlCol="0" anchor="ctr"/>
-          <a:lstStyle/>
-          <a:p>
-            <a:pPr algn="ctr" indent="0" marL="0">
-              <a:buNone/>
-            </a:pPr>
-            <a:r>
-              <a:rPr lang="en-US" sz="1500" b="1" dirty="0">
-                <a:solidFill>
-                  <a:srgbClr val="FFFFFF"/>
-                </a:solidFill>
-                <a:latin typeface="Calibri" pitchFamily="34" charset="0"/>
-                <a:ea typeface="Calibri" pitchFamily="34" charset="-122"/>
-                <a:cs typeface="Calibri" pitchFamily="34" charset="-120"/>
-              </a:rPr>
-              <a:t>2</a:t>
-            </a:r>
-            <a:endParaRPr lang="en-US" sz="1500" dirty="0"/>
-          </a:p>
-        </p:txBody>
-      </p:sp>
-      <p:sp>
-        <p:nvSpPr>
-          <p:cNvPr id="15" name="Text 13"/>
-          <p:cNvSpPr txBox="1"/>
-          <p:nvPr/>
-        </p:nvSpPr>
-        <p:spPr>
-          <a:xfrm>
-            <a:off x="4980432" y="2167128"/>
-            <a:ext cx="2740152" cy="457200"/>
-          </a:xfrm>
-          <a:prstGeom prst="rect">
-            <a:avLst/>
-          </a:prstGeom>
-          <a:noFill/>
-          <a:ln/>
-        </p:spPr>
-        <p:txBody>
-          <a:bodyPr wrap="square" lIns="0" tIns="0" rIns="0" bIns="0" rtlCol="0" anchor="t"/>
-          <a:lstStyle/>
-          <a:p>
-            <a:pPr indent="0" marL="0">
-              <a:buNone/>
-            </a:pPr>
-            <a:r>
-              <a:rPr lang="en-US" sz="1300" b="1" dirty="0">
-                <a:solidFill>
-                  <a:srgbClr val="0F2942"/>
-                </a:solidFill>
-                <a:latin typeface="Calibri" pitchFamily="34" charset="0"/>
-                <a:ea typeface="Calibri" pitchFamily="34" charset="-122"/>
-                <a:cs typeface="Calibri" pitchFamily="34" charset="-120"/>
-              </a:rPr>
-              <a:t>Minimize setups</a:t>
-            </a:r>
-            <a:endParaRPr lang="en-US" sz="1300" dirty="0"/>
-          </a:p>
-        </p:txBody>
-      </p:sp>
-      <p:sp>
-        <p:nvSpPr>
-          <p:cNvPr id="16" name="Text 14"/>
-          <p:cNvSpPr txBox="1"/>
-          <p:nvPr/>
-        </p:nvSpPr>
-        <p:spPr>
-          <a:xfrm>
-            <a:off x="4486656" y="2624328"/>
-            <a:ext cx="3233928" cy="1252728"/>
-          </a:xfrm>
-          <a:prstGeom prst="rect">
-            <a:avLst/>
-          </a:prstGeom>
-          <a:noFill/>
-          <a:ln/>
-        </p:spPr>
-        <p:txBody>
-          <a:bodyPr wrap="square" lIns="0" tIns="0" rIns="0" bIns="0" rtlCol="0" anchor="t"/>
-          <a:lstStyle/>
-          <a:p>
-            <a:pPr indent="0" marL="0">
-              <a:lnSpc>
-                <a:spcPct val="105000"/>
-              </a:lnSpc>
-              <a:buNone/>
-            </a:pPr>
-            <a:r>
-              <a:rPr lang="en-US" sz="1150" dirty="0">
-                <a:solidFill>
-                  <a:srgbClr val="44536B"/>
-                </a:solidFill>
-                <a:latin typeface="Calibri" pitchFamily="34" charset="0"/>
-                <a:ea typeface="Calibri" pitchFamily="34" charset="-122"/>
-                <a:cs typeface="Calibri" pitchFamily="34" charset="-120"/>
-              </a:rPr>
-              <a:t>features on one face are cheaper than features needing re-fixturing</a:t>
-            </a:r>
-            <a:endParaRPr lang="en-US" sz="1150" dirty="0"/>
-          </a:p>
-        </p:txBody>
-      </p:sp>
-      <p:sp>
-        <p:nvSpPr>
-          <p:cNvPr id="17" name="Shape 15"/>
-          <p:cNvSpPr/>
-          <p:nvPr/>
-        </p:nvSpPr>
-        <p:spPr>
-          <a:xfrm>
-            <a:off x="8141208" y="2057400"/>
-            <a:ext cx="3563112" cy="1911096"/>
+      <p:pic>
+        <p:nvPicPr>
+          <p:cNvPr id="11" name="Image 1" descr="/tmp/mech151_deck/images/40_laser_power.png">    </p:cNvPr>
+          <p:cNvPicPr>
+            <a:picLocks noChangeAspect="1"/>
+          </p:cNvPicPr>
+          <p:nvPr/>
+        </p:nvPicPr>
+        <p:blipFill>
+          <a:blip r:embed="rId2"/>
+          <a:stretch>
+            <a:fillRect/>
+          </a:stretch>
+        </p:blipFill>
+        <p:spPr>
+          <a:xfrm>
+            <a:off x="6355080" y="2833866"/>
+            <a:ext cx="5212080" cy="2607588"/>
+          </a:xfrm>
+          <a:prstGeom prst="rect">
+            <a:avLst/>
+          </a:prstGeom>
+        </p:spPr>
+      </p:pic>
+      <p:sp>
+        <p:nvSpPr>
+          <p:cNvPr id="12" name="Shape 8"/>
+          <p:cNvSpPr/>
+          <p:nvPr/>
+        </p:nvSpPr>
+        <p:spPr>
+          <a:xfrm>
+            <a:off x="502920" y="5715000"/>
+            <a:ext cx="11201400" cy="502920"/>
           </a:xfrm>
           <a:prstGeom prst="roundRect">
             <a:avLst>
-              <a:gd name="adj" fmla="val 3828"/>
+              <a:gd name="adj" fmla="val 14545"/>
             </a:avLst>
           </a:prstGeom>
           <a:solidFill>
             <a:srgbClr val="F3F6F9"/>
           </a:solidFill>
-          <a:ln w="12700">
+          <a:ln w="15875">
             <a:solidFill>
-              <a:srgbClr val="E1E7EE"/>
+              <a:srgbClr val="C0392B"/>
             </a:solidFill>
             <a:prstDash val="solid"/>
           </a:ln>
@@ -48040,298 +47970,50 @@
       </p:sp>
       <p:sp>
         <p:nvSpPr>
-          <p:cNvPr id="18" name="Shape 16"/>
-          <p:cNvSpPr/>
-          <p:nvPr/>
-        </p:nvSpPr>
-        <p:spPr>
-          <a:xfrm>
-            <a:off x="8305800" y="2203704"/>
-            <a:ext cx="384048" cy="384048"/>
-          </a:xfrm>
-          <a:prstGeom prst="ellipse">
-            <a:avLst/>
-          </a:prstGeom>
-          <a:solidFill>
-            <a:srgbClr val="D97706"/>
-          </a:solidFill>
-          <a:ln/>
-        </p:spPr>
-      </p:sp>
-      <p:sp>
-        <p:nvSpPr>
-          <p:cNvPr id="19" name="Text 17"/>
-          <p:cNvSpPr txBox="1"/>
-          <p:nvPr/>
-        </p:nvSpPr>
-        <p:spPr>
-          <a:xfrm>
-            <a:off x="8305800" y="2203704"/>
-            <a:ext cx="384048" cy="384048"/>
-          </a:xfrm>
-          <a:prstGeom prst="rect">
-            <a:avLst/>
-          </a:prstGeom>
-          <a:noFill/>
-          <a:ln/>
-        </p:spPr>
-        <p:txBody>
-          <a:bodyPr wrap="square" lIns="0" tIns="0" rIns="0" bIns="0" rtlCol="0" anchor="ctr"/>
-          <a:lstStyle/>
-          <a:p>
-            <a:pPr algn="ctr" indent="0" marL="0">
-              <a:buNone/>
-            </a:pPr>
-            <a:r>
-              <a:rPr lang="en-US" sz="1500" b="1" dirty="0">
-                <a:solidFill>
-                  <a:srgbClr val="FFFFFF"/>
-                </a:solidFill>
-                <a:latin typeface="Calibri" pitchFamily="34" charset="0"/>
-                <a:ea typeface="Calibri" pitchFamily="34" charset="-122"/>
-                <a:cs typeface="Calibri" pitchFamily="34" charset="-120"/>
-              </a:rPr>
-              <a:t>3</a:t>
-            </a:r>
-            <a:endParaRPr lang="en-US" sz="1500" dirty="0"/>
-          </a:p>
-        </p:txBody>
-      </p:sp>
-      <p:sp>
-        <p:nvSpPr>
-          <p:cNvPr id="20" name="Text 18"/>
-          <p:cNvSpPr txBox="1"/>
-          <p:nvPr/>
-        </p:nvSpPr>
-        <p:spPr>
-          <a:xfrm>
-            <a:off x="8799576" y="2167128"/>
-            <a:ext cx="2740152" cy="457200"/>
-          </a:xfrm>
-          <a:prstGeom prst="rect">
-            <a:avLst/>
-          </a:prstGeom>
-          <a:noFill/>
-          <a:ln/>
-        </p:spPr>
-        <p:txBody>
-          <a:bodyPr wrap="square" lIns="0" tIns="0" rIns="0" bIns="0" rtlCol="0" anchor="t"/>
-          <a:lstStyle/>
-          <a:p>
-            <a:pPr indent="0" marL="0">
-              <a:buNone/>
-            </a:pPr>
-            <a:r>
-              <a:rPr lang="en-US" sz="1300" b="1" dirty="0">
-                <a:solidFill>
-                  <a:srgbClr val="0F2942"/>
-                </a:solidFill>
-                <a:latin typeface="Calibri" pitchFamily="34" charset="0"/>
-                <a:ea typeface="Calibri" pitchFamily="34" charset="-122"/>
-                <a:cs typeface="Calibri" pitchFamily="34" charset="-120"/>
-              </a:rPr>
-              <a:t>Tolerance only what matters</a:t>
-            </a:r>
-            <a:endParaRPr lang="en-US" sz="1300" dirty="0"/>
-          </a:p>
-        </p:txBody>
-      </p:sp>
-      <p:sp>
-        <p:nvSpPr>
-          <p:cNvPr id="21" name="Text 19"/>
-          <p:cNvSpPr txBox="1"/>
-          <p:nvPr/>
-        </p:nvSpPr>
-        <p:spPr>
-          <a:xfrm>
-            <a:off x="8305800" y="2624328"/>
-            <a:ext cx="3233928" cy="1252728"/>
-          </a:xfrm>
-          <a:prstGeom prst="rect">
-            <a:avLst/>
-          </a:prstGeom>
-          <a:noFill/>
-          <a:ln/>
-        </p:spPr>
-        <p:txBody>
-          <a:bodyPr wrap="square" lIns="0" tIns="0" rIns="0" bIns="0" rtlCol="0" anchor="t"/>
+          <p:cNvPr id="13" name="Text 9"/>
+          <p:cNvSpPr txBox="1"/>
+          <p:nvPr/>
+        </p:nvSpPr>
+        <p:spPr>
+          <a:xfrm>
+            <a:off x="731520" y="5824728"/>
+            <a:ext cx="10744200" cy="283464"/>
+          </a:xfrm>
+          <a:prstGeom prst="rect">
+            <a:avLst/>
+          </a:prstGeom>
+          <a:noFill/>
+          <a:ln/>
+        </p:spPr>
+        <p:txBody>
+          <a:bodyPr wrap="square" lIns="0" tIns="0" rIns="0" bIns="0" rtlCol="0" anchor="ctr"/>
           <a:lstStyle/>
           <a:p>
             <a:pPr indent="0" marL="0">
               <a:lnSpc>
-                <a:spcPct val="105000"/>
+                <a:spcPct val="115000"/>
               </a:lnSpc>
               <a:buNone/>
             </a:pPr>
             <a:r>
-              <a:rPr lang="en-US" sz="1150" dirty="0">
-                <a:solidFill>
-                  <a:srgbClr val="44536B"/>
-                </a:solidFill>
-                <a:latin typeface="Calibri" pitchFamily="34" charset="0"/>
-                <a:ea typeface="Calibri" pitchFamily="34" charset="-122"/>
-                <a:cs typeface="Calibri" pitchFamily="34" charset="-120"/>
-              </a:rPr>
-              <a:t>tight tolerances drive cost — apply to mating/functional features</a:t>
-            </a:r>
-            <a:endParaRPr lang="en-US" sz="1150" dirty="0"/>
-          </a:p>
-        </p:txBody>
-      </p:sp>
-      <p:sp>
-        <p:nvSpPr>
-          <p:cNvPr id="22" name="Shape 20"/>
-          <p:cNvSpPr/>
-          <p:nvPr/>
-        </p:nvSpPr>
-        <p:spPr>
-          <a:xfrm>
-            <a:off x="502920" y="4169664"/>
-            <a:ext cx="3563112" cy="1911096"/>
-          </a:xfrm>
-          <a:prstGeom prst="roundRect">
-            <a:avLst>
-              <a:gd name="adj" fmla="val 3828"/>
-            </a:avLst>
-          </a:prstGeom>
-          <a:solidFill>
-            <a:srgbClr val="F3F6F9"/>
-          </a:solidFill>
-          <a:ln w="12700">
-            <a:solidFill>
-              <a:srgbClr val="E1E7EE"/>
-            </a:solidFill>
-            <a:prstDash val="solid"/>
-          </a:ln>
-        </p:spPr>
-      </p:sp>
-      <p:sp>
-        <p:nvSpPr>
-          <p:cNvPr id="23" name="Shape 21"/>
-          <p:cNvSpPr/>
-          <p:nvPr/>
-        </p:nvSpPr>
-        <p:spPr>
-          <a:xfrm>
-            <a:off x="667512" y="4315968"/>
-            <a:ext cx="384048" cy="384048"/>
-          </a:xfrm>
-          <a:prstGeom prst="ellipse">
-            <a:avLst/>
-          </a:prstGeom>
-          <a:solidFill>
-            <a:srgbClr val="D97706"/>
-          </a:solidFill>
-          <a:ln/>
-        </p:spPr>
-      </p:sp>
-      <p:sp>
-        <p:nvSpPr>
-          <p:cNvPr id="24" name="Text 22"/>
-          <p:cNvSpPr txBox="1"/>
-          <p:nvPr/>
-        </p:nvSpPr>
-        <p:spPr>
-          <a:xfrm>
-            <a:off x="667512" y="4315968"/>
-            <a:ext cx="384048" cy="384048"/>
-          </a:xfrm>
-          <a:prstGeom prst="rect">
-            <a:avLst/>
-          </a:prstGeom>
-          <a:noFill/>
-          <a:ln/>
-        </p:spPr>
-        <p:txBody>
-          <a:bodyPr wrap="square" lIns="0" tIns="0" rIns="0" bIns="0" rtlCol="0" anchor="ctr"/>
-          <a:lstStyle/>
-          <a:p>
-            <a:pPr algn="ctr" indent="0" marL="0">
-              <a:buNone/>
-            </a:pPr>
-            <a:r>
-              <a:rPr lang="en-US" sz="1500" b="1" dirty="0">
-                <a:solidFill>
-                  <a:srgbClr val="FFFFFF"/>
-                </a:solidFill>
-                <a:latin typeface="Calibri" pitchFamily="34" charset="0"/>
-                <a:ea typeface="Calibri" pitchFamily="34" charset="-122"/>
-                <a:cs typeface="Calibri" pitchFamily="34" charset="-120"/>
-              </a:rPr>
-              <a:t>4</a:t>
-            </a:r>
-            <a:endParaRPr lang="en-US" sz="1500" dirty="0"/>
-          </a:p>
-        </p:txBody>
-      </p:sp>
-      <p:sp>
-        <p:nvSpPr>
-          <p:cNvPr id="25" name="Text 23"/>
-          <p:cNvSpPr txBox="1"/>
-          <p:nvPr/>
-        </p:nvSpPr>
-        <p:spPr>
-          <a:xfrm>
-            <a:off x="1161288" y="4279392"/>
-            <a:ext cx="2740152" cy="457200"/>
-          </a:xfrm>
-          <a:prstGeom prst="rect">
-            <a:avLst/>
-          </a:prstGeom>
-          <a:noFill/>
-          <a:ln/>
-        </p:spPr>
-        <p:txBody>
-          <a:bodyPr wrap="square" lIns="0" tIns="0" rIns="0" bIns="0" rtlCol="0" anchor="t"/>
-          <a:lstStyle/>
-          <a:p>
-            <a:pPr indent="0" marL="0">
-              <a:buNone/>
-            </a:pPr>
-            <a:r>
-              <a:rPr lang="en-US" sz="1300" b="1" dirty="0">
-                <a:solidFill>
-                  <a:srgbClr val="0F2942"/>
-                </a:solidFill>
-                <a:latin typeface="Calibri" pitchFamily="34" charset="0"/>
-                <a:ea typeface="Calibri" pitchFamily="34" charset="-122"/>
-                <a:cs typeface="Calibri" pitchFamily="34" charset="-120"/>
-              </a:rPr>
-              <a:t>Use standard stock &amp; tooling</a:t>
-            </a:r>
-            <a:endParaRPr lang="en-US" sz="1300" dirty="0"/>
-          </a:p>
-        </p:txBody>
-      </p:sp>
-      <p:sp>
-        <p:nvSpPr>
-          <p:cNvPr id="26" name="Text 24"/>
-          <p:cNvSpPr txBox="1"/>
-          <p:nvPr/>
-        </p:nvSpPr>
-        <p:spPr>
-          <a:xfrm>
-            <a:off x="667512" y="4736592"/>
-            <a:ext cx="3233928" cy="1252728"/>
-          </a:xfrm>
-          <a:prstGeom prst="rect">
-            <a:avLst/>
-          </a:prstGeom>
-          <a:noFill/>
-          <a:ln/>
-        </p:spPr>
-        <p:txBody>
-          <a:bodyPr wrap="square" lIns="0" tIns="0" rIns="0" bIns="0" rtlCol="0" anchor="t"/>
-          <a:lstStyle/>
-          <a:p>
+              <a:rPr lang="en-US" sz="1250" b="1" dirty="0">
+                <a:solidFill>
+                  <a:srgbClr val="C0392B"/>
+                </a:solidFill>
+                <a:latin typeface="Calibri" pitchFamily="34" charset="0"/>
+                <a:ea typeface="Calibri" pitchFamily="34" charset="-122"/>
+                <a:cs typeface="Calibri" pitchFamily="34" charset="-120"/>
+              </a:rPr>
+              <a:t>Never cut:  </a:t>
+            </a:r>
             <a:pPr indent="0" marL="0">
               <a:lnSpc>
-                <a:spcPct val="105000"/>
+                <a:spcPct val="115000"/>
               </a:lnSpc>
               <a:buNone/>
             </a:pPr>
             <a:r>
-              <a:rPr lang="en-US" sz="1150" dirty="0">
+              <a:rPr lang="en-US" sz="1250" dirty="0">
                 <a:solidFill>
                   <a:srgbClr val="44536B"/>
                 </a:solidFill>
@@ -48339,176 +48021,9 @@
                 <a:ea typeface="Calibri" pitchFamily="34" charset="-122"/>
                 <a:cs typeface="Calibri" pitchFamily="34" charset="-120"/>
               </a:rPr>
-              <a:t>standard sizes and drill/tool radii cost less, arrive faster</a:t>
-            </a:r>
-            <a:endParaRPr lang="en-US" sz="1150" dirty="0"/>
-          </a:p>
-        </p:txBody>
-      </p:sp>
-      <p:sp>
-        <p:nvSpPr>
-          <p:cNvPr id="27" name="Shape 25"/>
-          <p:cNvSpPr/>
-          <p:nvPr/>
-        </p:nvSpPr>
-        <p:spPr>
-          <a:xfrm>
-            <a:off x="4322064" y="4169664"/>
-            <a:ext cx="3563112" cy="1911096"/>
-          </a:xfrm>
-          <a:prstGeom prst="roundRect">
-            <a:avLst>
-              <a:gd name="adj" fmla="val 3828"/>
-            </a:avLst>
-          </a:prstGeom>
-          <a:solidFill>
-            <a:srgbClr val="F3F6F9"/>
-          </a:solidFill>
-          <a:ln w="12700">
-            <a:solidFill>
-              <a:srgbClr val="E1E7EE"/>
-            </a:solidFill>
-            <a:prstDash val="solid"/>
-          </a:ln>
-        </p:spPr>
-      </p:sp>
-      <p:sp>
-        <p:nvSpPr>
-          <p:cNvPr id="28" name="Shape 26"/>
-          <p:cNvSpPr/>
-          <p:nvPr/>
-        </p:nvSpPr>
-        <p:spPr>
-          <a:xfrm>
-            <a:off x="4486656" y="4315968"/>
-            <a:ext cx="384048" cy="384048"/>
-          </a:xfrm>
-          <a:prstGeom prst="ellipse">
-            <a:avLst/>
-          </a:prstGeom>
-          <a:solidFill>
-            <a:srgbClr val="D97706"/>
-          </a:solidFill>
-          <a:ln/>
-        </p:spPr>
-      </p:sp>
-      <p:sp>
-        <p:nvSpPr>
-          <p:cNvPr id="29" name="Text 27"/>
-          <p:cNvSpPr txBox="1"/>
-          <p:nvPr/>
-        </p:nvSpPr>
-        <p:spPr>
-          <a:xfrm>
-            <a:off x="4486656" y="4315968"/>
-            <a:ext cx="384048" cy="384048"/>
-          </a:xfrm>
-          <a:prstGeom prst="rect">
-            <a:avLst/>
-          </a:prstGeom>
-          <a:noFill/>
-          <a:ln/>
-        </p:spPr>
-        <p:txBody>
-          <a:bodyPr wrap="square" lIns="0" tIns="0" rIns="0" bIns="0" rtlCol="0" anchor="ctr"/>
-          <a:lstStyle/>
-          <a:p>
-            <a:pPr algn="ctr" indent="0" marL="0">
-              <a:buNone/>
-            </a:pPr>
-            <a:r>
-              <a:rPr lang="en-US" sz="1500" b="1" dirty="0">
-                <a:solidFill>
-                  <a:srgbClr val="FFFFFF"/>
-                </a:solidFill>
-                <a:latin typeface="Calibri" pitchFamily="34" charset="0"/>
-                <a:ea typeface="Calibri" pitchFamily="34" charset="-122"/>
-                <a:cs typeface="Calibri" pitchFamily="34" charset="-120"/>
-              </a:rPr>
-              <a:t>5</a:t>
-            </a:r>
-            <a:endParaRPr lang="en-US" sz="1500" dirty="0"/>
-          </a:p>
-        </p:txBody>
-      </p:sp>
-      <p:sp>
-        <p:nvSpPr>
-          <p:cNvPr id="30" name="Text 28"/>
-          <p:cNvSpPr txBox="1"/>
-          <p:nvPr/>
-        </p:nvSpPr>
-        <p:spPr>
-          <a:xfrm>
-            <a:off x="4980432" y="4279392"/>
-            <a:ext cx="2740152" cy="457200"/>
-          </a:xfrm>
-          <a:prstGeom prst="rect">
-            <a:avLst/>
-          </a:prstGeom>
-          <a:noFill/>
-          <a:ln/>
-        </p:spPr>
-        <p:txBody>
-          <a:bodyPr wrap="square" lIns="0" tIns="0" rIns="0" bIns="0" rtlCol="0" anchor="t"/>
-          <a:lstStyle/>
-          <a:p>
-            <a:pPr indent="0" marL="0">
-              <a:buNone/>
-            </a:pPr>
-            <a:r>
-              <a:rPr lang="en-US" sz="1300" b="1" dirty="0">
-                <a:solidFill>
-                  <a:srgbClr val="0F2942"/>
-                </a:solidFill>
-                <a:latin typeface="Calibri" pitchFamily="34" charset="0"/>
-                <a:ea typeface="Calibri" pitchFamily="34" charset="-122"/>
-                <a:cs typeface="Calibri" pitchFamily="34" charset="-120"/>
-              </a:rPr>
-              <a:t>Design for prototype AND product</a:t>
-            </a:r>
-            <a:endParaRPr lang="en-US" sz="1300" dirty="0"/>
-          </a:p>
-        </p:txBody>
-      </p:sp>
-      <p:sp>
-        <p:nvSpPr>
-          <p:cNvPr id="31" name="Text 29"/>
-          <p:cNvSpPr txBox="1"/>
-          <p:nvPr/>
-        </p:nvSpPr>
-        <p:spPr>
-          <a:xfrm>
-            <a:off x="4486656" y="4736592"/>
-            <a:ext cx="3233928" cy="1252728"/>
-          </a:xfrm>
-          <a:prstGeom prst="rect">
-            <a:avLst/>
-          </a:prstGeom>
-          <a:noFill/>
-          <a:ln/>
-        </p:spPr>
-        <p:txBody>
-          <a:bodyPr wrap="square" lIns="0" tIns="0" rIns="0" bIns="0" rtlCol="0" anchor="t"/>
-          <a:lstStyle/>
-          <a:p>
-            <a:pPr indent="0" marL="0">
-              <a:lnSpc>
-                <a:spcPct val="105000"/>
-              </a:lnSpc>
-              <a:buNone/>
-            </a:pPr>
-            <a:r>
-              <a:rPr lang="en-US" sz="1150" dirty="0">
-                <a:solidFill>
-                  <a:srgbClr val="44536B"/>
-                </a:solidFill>
-                <a:latin typeface="Calibri" pitchFamily="34" charset="0"/>
-                <a:ea typeface="Calibri" pitchFamily="34" charset="-122"/>
-                <a:cs typeface="Calibri" pitchFamily="34" charset="-120"/>
-              </a:rPr>
-              <a:t>what's fine for a one-off print may not survive production</a:t>
-            </a:r>
-            <a:endParaRPr lang="en-US" sz="1150" dirty="0"/>
+              <a:t>PVC and other chlorinated plastics must never be cut on a laser — they release chlorine gas.</a:t>
+            </a:r>
+            <a:endParaRPr lang="en-US" sz="1250" dirty="0"/>
           </a:p>
         </p:txBody>
       </p:sp>
@@ -48638,7 +48153,7 @@
                 <a:ea typeface="Cambria" pitchFamily="34" charset="-122"/>
                 <a:cs typeface="Cambria" pitchFamily="34" charset="-120"/>
               </a:rPr>
-              <a:t>Machine Safety, PPE &amp; Operation</a:t>
+              <a:t>DFM Design Considerations</a:t>
             </a:r>
             <a:endParaRPr lang="en-US" sz="2600" dirty="0"/>
           </a:p>
@@ -48677,7 +48192,7 @@
                 <a:ea typeface="Calibri" pitchFamily="34" charset="-122"/>
                 <a:cs typeface="Calibri" pitchFamily="34" charset="-120"/>
               </a:rPr>
-              <a:t>Students are checked out on safe setup and operation before running any shop equipment.</a:t>
+              <a:t>Shape the part so the chosen process can make it well, at reasonable cost, without special effort.</a:t>
             </a:r>
             <a:endParaRPr lang="en-US" sz="1250" dirty="0"/>
           </a:p>
@@ -48724,223 +48239,26 @@
       </p:sp>
       <p:sp>
         <p:nvSpPr>
-          <p:cNvPr id="7" name="Text 5"/>
-          <p:cNvSpPr txBox="1"/>
-          <p:nvPr/>
-        </p:nvSpPr>
-        <p:spPr>
-          <a:xfrm>
-            <a:off x="502920" y="2011680"/>
-            <a:ext cx="11201400" cy="3108960"/>
-          </a:xfrm>
-          <a:prstGeom prst="rect">
-            <a:avLst/>
-          </a:prstGeom>
-          <a:noFill/>
-          <a:ln/>
-        </p:spPr>
-        <p:txBody>
-          <a:bodyPr wrap="square" lIns="0" tIns="0" rIns="0" bIns="0" rtlCol="0" anchor="t"/>
-          <a:lstStyle/>
-          <a:p>
-            <a:pPr marL="342900" indent="-342900">
-              <a:buSzPct val="100000"/>
-              <a:buChar char="●"/>
-            </a:pPr>
-            <a:r>
-              <a:rPr lang="en-US" sz="1250" b="1" dirty="0">
-                <a:solidFill>
-                  <a:srgbClr val="0F2942"/>
-                </a:solidFill>
-                <a:latin typeface="Calibri" pitchFamily="34" charset="0"/>
-                <a:ea typeface="Calibri" pitchFamily="34" charset="-122"/>
-                <a:cs typeface="Calibri" pitchFamily="34" charset="-120"/>
-              </a:rPr>
-              <a:t>Baseline PPE — </a:t>
-            </a:r>
-            <a:pPr indent="0" marL="0">
-              <a:spcAft>
-                <a:spcPts val="800"/>
-              </a:spcAft>
-              <a:buNone/>
-            </a:pPr>
-            <a:r>
-              <a:rPr lang="en-US" sz="1250" dirty="0">
-                <a:solidFill>
-                  <a:srgbClr val="44536B"/>
-                </a:solidFill>
-                <a:latin typeface="Calibri" pitchFamily="34" charset="0"/>
-                <a:ea typeface="Calibri" pitchFamily="34" charset="-122"/>
-                <a:cs typeface="Calibri" pitchFamily="34" charset="-120"/>
-              </a:rPr>
-              <a:t>ANSI Z87.1 safety glasses, closed-toe shoes, no loose clothing/jewelry/unrestrained hair</a:t>
-            </a:r>
-            <a:endParaRPr lang="en-US" sz="1250" dirty="0"/>
-          </a:p>
-          <a:p>
-            <a:pPr marL="342900" indent="-342900">
-              <a:buSzPct val="100000"/>
-              <a:buChar char="●"/>
-            </a:pPr>
-            <a:r>
-              <a:rPr lang="en-US" sz="1250" b="1" dirty="0">
-                <a:solidFill>
-                  <a:srgbClr val="0F2942"/>
-                </a:solidFill>
-                <a:latin typeface="Calibri" pitchFamily="34" charset="0"/>
-                <a:ea typeface="Calibri" pitchFamily="34" charset="-122"/>
-                <a:cs typeface="Calibri" pitchFamily="34" charset="-120"/>
-              </a:rPr>
-              <a:t>Rotating machinery — </a:t>
-            </a:r>
-            <a:pPr indent="0" marL="0">
-              <a:spcAft>
-                <a:spcPts val="800"/>
-              </a:spcAft>
-              <a:buNone/>
-            </a:pPr>
-            <a:r>
-              <a:rPr lang="en-US" sz="1250" dirty="0">
-                <a:solidFill>
-                  <a:srgbClr val="44536B"/>
-                </a:solidFill>
-                <a:latin typeface="Calibri" pitchFamily="34" charset="0"/>
-                <a:ea typeface="Calibri" pitchFamily="34" charset="-122"/>
-                <a:cs typeface="Calibri" pitchFamily="34" charset="-120"/>
-              </a:rPr>
-              <a:t>never wear gloves near a spindle, chuck, or bit — a caught glove pulls the hand in</a:t>
-            </a:r>
-            <a:endParaRPr lang="en-US" sz="1250" dirty="0"/>
-          </a:p>
-          <a:p>
-            <a:pPr marL="342900" indent="-342900">
-              <a:buSzPct val="100000"/>
-              <a:buChar char="●"/>
-            </a:pPr>
-            <a:r>
-              <a:rPr lang="en-US" sz="1250" b="1" dirty="0">
-                <a:solidFill>
-                  <a:srgbClr val="0F2942"/>
-                </a:solidFill>
-                <a:latin typeface="Calibri" pitchFamily="34" charset="0"/>
-                <a:ea typeface="Calibri" pitchFamily="34" charset="-122"/>
-                <a:cs typeface="Calibri" pitchFamily="34" charset="-120"/>
-              </a:rPr>
-              <a:t>Laser cutter — </a:t>
-            </a:r>
-            <a:pPr indent="0" marL="0">
-              <a:spcAft>
-                <a:spcPts val="800"/>
-              </a:spcAft>
-              <a:buNone/>
-            </a:pPr>
-            <a:r>
-              <a:rPr lang="en-US" sz="1250" dirty="0">
-                <a:solidFill>
-                  <a:srgbClr val="44536B"/>
-                </a:solidFill>
-                <a:latin typeface="Calibri" pitchFamily="34" charset="0"/>
-                <a:ea typeface="Calibri" pitchFamily="34" charset="-122"/>
-                <a:cs typeface="Calibri" pitchFamily="34" charset="-120"/>
-              </a:rPr>
-              <a:t>never run unattended; keep a view of the cut; know the extraction and fire response</a:t>
-            </a:r>
-            <a:endParaRPr lang="en-US" sz="1250" dirty="0"/>
-          </a:p>
-          <a:p>
-            <a:pPr marL="342900" indent="-342900">
-              <a:buSzPct val="100000"/>
-              <a:buChar char="●"/>
-            </a:pPr>
-            <a:r>
-              <a:rPr lang="en-US" sz="1250" b="1" dirty="0">
-                <a:solidFill>
-                  <a:srgbClr val="0F2942"/>
-                </a:solidFill>
-                <a:latin typeface="Calibri" pitchFamily="34" charset="0"/>
-                <a:ea typeface="Calibri" pitchFamily="34" charset="-122"/>
-                <a:cs typeface="Calibri" pitchFamily="34" charset="-120"/>
-              </a:rPr>
-              <a:t>3D printers — </a:t>
-            </a:r>
-            <a:pPr indent="0" marL="0">
-              <a:spcAft>
-                <a:spcPts val="800"/>
-              </a:spcAft>
-              <a:buNone/>
-            </a:pPr>
-            <a:r>
-              <a:rPr lang="en-US" sz="1250" dirty="0">
-                <a:solidFill>
-                  <a:srgbClr val="44536B"/>
-                </a:solidFill>
-                <a:latin typeface="Calibri" pitchFamily="34" charset="0"/>
-                <a:ea typeface="Calibri" pitchFamily="34" charset="-122"/>
-                <a:cs typeface="Calibri" pitchFamily="34" charset="-120"/>
-              </a:rPr>
-              <a:t>hot nozzle and bed — let them cool, don't reach into an active machine</a:t>
-            </a:r>
-            <a:endParaRPr lang="en-US" sz="1250" dirty="0"/>
-          </a:p>
-          <a:p>
-            <a:pPr marL="342900" indent="-342900">
-              <a:buSzPct val="100000"/>
-              <a:buChar char="●"/>
-            </a:pPr>
-            <a:r>
-              <a:rPr lang="en-US" sz="1250" b="1" dirty="0">
-                <a:solidFill>
-                  <a:srgbClr val="0F2942"/>
-                </a:solidFill>
-                <a:latin typeface="Calibri" pitchFamily="34" charset="0"/>
-                <a:ea typeface="Calibri" pitchFamily="34" charset="-122"/>
-                <a:cs typeface="Calibri" pitchFamily="34" charset="-120"/>
-              </a:rPr>
-              <a:t>Before starting — </a:t>
-            </a:r>
-            <a:pPr indent="0" marL="0">
-              <a:spcAft>
-                <a:spcPts val="800"/>
-              </a:spcAft>
-              <a:buNone/>
-            </a:pPr>
-            <a:r>
-              <a:rPr lang="en-US" sz="1250" dirty="0">
-                <a:solidFill>
-                  <a:srgbClr val="44536B"/>
-                </a:solidFill>
-                <a:latin typeface="Calibri" pitchFamily="34" charset="0"/>
-                <a:ea typeface="Calibri" pitchFamily="34" charset="-122"/>
-                <a:cs typeface="Calibri" pitchFamily="34" charset="-120"/>
-              </a:rPr>
-              <a:t>know the location of the e-stop, fire extinguisher, and first-aid kit</a:t>
-            </a:r>
-            <a:endParaRPr lang="en-US" sz="1250" dirty="0"/>
-          </a:p>
-        </p:txBody>
-      </p:sp>
-      <p:sp>
-        <p:nvSpPr>
-          <p:cNvPr id="8" name="Shape 6"/>
-          <p:cNvSpPr/>
-          <p:nvPr/>
-        </p:nvSpPr>
-        <p:spPr>
-          <a:xfrm>
-            <a:off x="502920" y="5212080"/>
-            <a:ext cx="11201400" cy="777240"/>
+          <p:cNvPr id="7" name="Shape 5"/>
+          <p:cNvSpPr/>
+          <p:nvPr/>
+        </p:nvSpPr>
+        <p:spPr>
+          <a:xfrm>
+            <a:off x="502920" y="2057400"/>
+            <a:ext cx="3563112" cy="1911096"/>
           </a:xfrm>
           <a:prstGeom prst="roundRect">
             <a:avLst>
-              <a:gd name="adj" fmla="val 9412"/>
+              <a:gd name="adj" fmla="val 3828"/>
             </a:avLst>
           </a:prstGeom>
           <a:solidFill>
             <a:srgbClr val="F3F6F9"/>
           </a:solidFill>
-          <a:ln w="15875">
+          <a:ln w="12700">
             <a:solidFill>
-              <a:srgbClr val="C0392B"/>
+              <a:srgbClr val="E1E7EE"/>
             </a:solidFill>
             <a:prstDash val="solid"/>
           </a:ln>
@@ -48948,50 +48266,298 @@
       </p:sp>
       <p:sp>
         <p:nvSpPr>
+          <p:cNvPr id="8" name="Shape 6"/>
+          <p:cNvSpPr/>
+          <p:nvPr/>
+        </p:nvSpPr>
+        <p:spPr>
+          <a:xfrm>
+            <a:off x="667512" y="2203704"/>
+            <a:ext cx="384048" cy="384048"/>
+          </a:xfrm>
+          <a:prstGeom prst="ellipse">
+            <a:avLst/>
+          </a:prstGeom>
+          <a:solidFill>
+            <a:srgbClr val="D97706"/>
+          </a:solidFill>
+          <a:ln/>
+        </p:spPr>
+      </p:sp>
+      <p:sp>
+        <p:nvSpPr>
           <p:cNvPr id="9" name="Text 7"/>
           <p:cNvSpPr txBox="1"/>
           <p:nvPr/>
         </p:nvSpPr>
         <p:spPr>
           <a:xfrm>
-            <a:off x="731520" y="5321808"/>
-            <a:ext cx="10744200" cy="557784"/>
-          </a:xfrm>
-          <a:prstGeom prst="rect">
-            <a:avLst/>
-          </a:prstGeom>
-          <a:noFill/>
-          <a:ln/>
-        </p:spPr>
-        <p:txBody>
-          <a:bodyPr wrap="square" lIns="0" tIns="0" rIns="0" bIns="0" rtlCol="0" anchor="ctr"/>
+            <a:off x="667512" y="2203704"/>
+            <a:ext cx="384048" cy="384048"/>
+          </a:xfrm>
+          <a:prstGeom prst="rect">
+            <a:avLst/>
+          </a:prstGeom>
+          <a:noFill/>
+          <a:ln/>
+        </p:spPr>
+        <p:txBody>
+          <a:bodyPr wrap="square" lIns="0" tIns="0" rIns="0" bIns="0" rtlCol="0" anchor="ctr"/>
+          <a:lstStyle/>
+          <a:p>
+            <a:pPr algn="ctr" indent="0" marL="0">
+              <a:buNone/>
+            </a:pPr>
+            <a:r>
+              <a:rPr lang="en-US" sz="1500" b="1" dirty="0">
+                <a:solidFill>
+                  <a:srgbClr val="FFFFFF"/>
+                </a:solidFill>
+                <a:latin typeface="Calibri" pitchFamily="34" charset="0"/>
+                <a:ea typeface="Calibri" pitchFamily="34" charset="-122"/>
+                <a:cs typeface="Calibri" pitchFamily="34" charset="-120"/>
+              </a:rPr>
+              <a:t>1</a:t>
+            </a:r>
+            <a:endParaRPr lang="en-US" sz="1500" dirty="0"/>
+          </a:p>
+        </p:txBody>
+      </p:sp>
+      <p:sp>
+        <p:nvSpPr>
+          <p:cNvPr id="10" name="Text 8"/>
+          <p:cNvSpPr txBox="1"/>
+          <p:nvPr/>
+        </p:nvSpPr>
+        <p:spPr>
+          <a:xfrm>
+            <a:off x="1161288" y="2167128"/>
+            <a:ext cx="2740152" cy="457200"/>
+          </a:xfrm>
+          <a:prstGeom prst="rect">
+            <a:avLst/>
+          </a:prstGeom>
+          <a:noFill/>
+          <a:ln/>
+        </p:spPr>
+        <p:txBody>
+          <a:bodyPr wrap="square" lIns="0" tIns="0" rIns="0" bIns="0" rtlCol="0" anchor="t"/>
+          <a:lstStyle/>
+          <a:p>
+            <a:pPr indent="0" marL="0">
+              <a:buNone/>
+            </a:pPr>
+            <a:r>
+              <a:rPr lang="en-US" sz="1300" b="1" dirty="0">
+                <a:solidFill>
+                  <a:srgbClr val="0F2942"/>
+                </a:solidFill>
+                <a:latin typeface="Calibri" pitchFamily="34" charset="0"/>
+                <a:ea typeface="Calibri" pitchFamily="34" charset="-122"/>
+                <a:cs typeface="Calibri" pitchFamily="34" charset="-120"/>
+              </a:rPr>
+              <a:t>Match design to process</a:t>
+            </a:r>
+            <a:endParaRPr lang="en-US" sz="1300" dirty="0"/>
+          </a:p>
+        </p:txBody>
+      </p:sp>
+      <p:sp>
+        <p:nvSpPr>
+          <p:cNvPr id="11" name="Text 9"/>
+          <p:cNvSpPr txBox="1"/>
+          <p:nvPr/>
+        </p:nvSpPr>
+        <p:spPr>
+          <a:xfrm>
+            <a:off x="667512" y="2624328"/>
+            <a:ext cx="3233928" cy="1252728"/>
+          </a:xfrm>
+          <a:prstGeom prst="rect">
+            <a:avLst/>
+          </a:prstGeom>
+          <a:noFill/>
+          <a:ln/>
+        </p:spPr>
+        <p:txBody>
+          <a:bodyPr wrap="square" lIns="0" tIns="0" rIns="0" bIns="0" rtlCol="0" anchor="t"/>
           <a:lstStyle/>
           <a:p>
             <a:pPr indent="0" marL="0">
               <a:lnSpc>
-                <a:spcPct val="115000"/>
+                <a:spcPct val="105000"/>
               </a:lnSpc>
               <a:buNone/>
             </a:pPr>
             <a:r>
-              <a:rPr lang="en-US" sz="1250" b="1" dirty="0">
-                <a:solidFill>
-                  <a:srgbClr val="C0392B"/>
-                </a:solidFill>
-                <a:latin typeface="Calibri" pitchFamily="34" charset="0"/>
-                <a:ea typeface="Calibri" pitchFamily="34" charset="-122"/>
-                <a:cs typeface="Calibri" pitchFamily="34" charset="-120"/>
-              </a:rPr>
-              <a:t>PPE is not optional:  </a:t>
-            </a:r>
+              <a:rPr lang="en-US" sz="1150" dirty="0">
+                <a:solidFill>
+                  <a:srgbClr val="44536B"/>
+                </a:solidFill>
+                <a:latin typeface="Calibri" pitchFamily="34" charset="0"/>
+                <a:ea typeface="Calibri" pitchFamily="34" charset="-122"/>
+                <a:cs typeface="Calibri" pitchFamily="34" charset="-120"/>
+              </a:rPr>
+              <a:t>uniform walls for printing/casting, generous radii for machining, flat unfolded geometry for laser</a:t>
+            </a:r>
+            <a:endParaRPr lang="en-US" sz="1150" dirty="0"/>
+          </a:p>
+        </p:txBody>
+      </p:sp>
+      <p:sp>
+        <p:nvSpPr>
+          <p:cNvPr id="12" name="Shape 10"/>
+          <p:cNvSpPr/>
+          <p:nvPr/>
+        </p:nvSpPr>
+        <p:spPr>
+          <a:xfrm>
+            <a:off x="4322064" y="2057400"/>
+            <a:ext cx="3563112" cy="1911096"/>
+          </a:xfrm>
+          <a:prstGeom prst="roundRect">
+            <a:avLst>
+              <a:gd name="adj" fmla="val 3828"/>
+            </a:avLst>
+          </a:prstGeom>
+          <a:solidFill>
+            <a:srgbClr val="F3F6F9"/>
+          </a:solidFill>
+          <a:ln w="12700">
+            <a:solidFill>
+              <a:srgbClr val="E1E7EE"/>
+            </a:solidFill>
+            <a:prstDash val="solid"/>
+          </a:ln>
+        </p:spPr>
+      </p:sp>
+      <p:sp>
+        <p:nvSpPr>
+          <p:cNvPr id="13" name="Shape 11"/>
+          <p:cNvSpPr/>
+          <p:nvPr/>
+        </p:nvSpPr>
+        <p:spPr>
+          <a:xfrm>
+            <a:off x="4486656" y="2203704"/>
+            <a:ext cx="384048" cy="384048"/>
+          </a:xfrm>
+          <a:prstGeom prst="ellipse">
+            <a:avLst/>
+          </a:prstGeom>
+          <a:solidFill>
+            <a:srgbClr val="D97706"/>
+          </a:solidFill>
+          <a:ln/>
+        </p:spPr>
+      </p:sp>
+      <p:sp>
+        <p:nvSpPr>
+          <p:cNvPr id="14" name="Text 12"/>
+          <p:cNvSpPr txBox="1"/>
+          <p:nvPr/>
+        </p:nvSpPr>
+        <p:spPr>
+          <a:xfrm>
+            <a:off x="4486656" y="2203704"/>
+            <a:ext cx="384048" cy="384048"/>
+          </a:xfrm>
+          <a:prstGeom prst="rect">
+            <a:avLst/>
+          </a:prstGeom>
+          <a:noFill/>
+          <a:ln/>
+        </p:spPr>
+        <p:txBody>
+          <a:bodyPr wrap="square" lIns="0" tIns="0" rIns="0" bIns="0" rtlCol="0" anchor="ctr"/>
+          <a:lstStyle/>
+          <a:p>
+            <a:pPr algn="ctr" indent="0" marL="0">
+              <a:buNone/>
+            </a:pPr>
+            <a:r>
+              <a:rPr lang="en-US" sz="1500" b="1" dirty="0">
+                <a:solidFill>
+                  <a:srgbClr val="FFFFFF"/>
+                </a:solidFill>
+                <a:latin typeface="Calibri" pitchFamily="34" charset="0"/>
+                <a:ea typeface="Calibri" pitchFamily="34" charset="-122"/>
+                <a:cs typeface="Calibri" pitchFamily="34" charset="-120"/>
+              </a:rPr>
+              <a:t>2</a:t>
+            </a:r>
+            <a:endParaRPr lang="en-US" sz="1500" dirty="0"/>
+          </a:p>
+        </p:txBody>
+      </p:sp>
+      <p:sp>
+        <p:nvSpPr>
+          <p:cNvPr id="15" name="Text 13"/>
+          <p:cNvSpPr txBox="1"/>
+          <p:nvPr/>
+        </p:nvSpPr>
+        <p:spPr>
+          <a:xfrm>
+            <a:off x="4980432" y="2167128"/>
+            <a:ext cx="2740152" cy="457200"/>
+          </a:xfrm>
+          <a:prstGeom prst="rect">
+            <a:avLst/>
+          </a:prstGeom>
+          <a:noFill/>
+          <a:ln/>
+        </p:spPr>
+        <p:txBody>
+          <a:bodyPr wrap="square" lIns="0" tIns="0" rIns="0" bIns="0" rtlCol="0" anchor="t"/>
+          <a:lstStyle/>
+          <a:p>
+            <a:pPr indent="0" marL="0">
+              <a:buNone/>
+            </a:pPr>
+            <a:r>
+              <a:rPr lang="en-US" sz="1300" b="1" dirty="0">
+                <a:solidFill>
+                  <a:srgbClr val="0F2942"/>
+                </a:solidFill>
+                <a:latin typeface="Calibri" pitchFamily="34" charset="0"/>
+                <a:ea typeface="Calibri" pitchFamily="34" charset="-122"/>
+                <a:cs typeface="Calibri" pitchFamily="34" charset="-120"/>
+              </a:rPr>
+              <a:t>Minimize setups</a:t>
+            </a:r>
+            <a:endParaRPr lang="en-US" sz="1300" dirty="0"/>
+          </a:p>
+        </p:txBody>
+      </p:sp>
+      <p:sp>
+        <p:nvSpPr>
+          <p:cNvPr id="16" name="Text 14"/>
+          <p:cNvSpPr txBox="1"/>
+          <p:nvPr/>
+        </p:nvSpPr>
+        <p:spPr>
+          <a:xfrm>
+            <a:off x="4486656" y="2624328"/>
+            <a:ext cx="3233928" cy="1252728"/>
+          </a:xfrm>
+          <a:prstGeom prst="rect">
+            <a:avLst/>
+          </a:prstGeom>
+          <a:noFill/>
+          <a:ln/>
+        </p:spPr>
+        <p:txBody>
+          <a:bodyPr wrap="square" lIns="0" tIns="0" rIns="0" bIns="0" rtlCol="0" anchor="t"/>
+          <a:lstStyle/>
+          <a:p>
             <a:pPr indent="0" marL="0">
               <a:lnSpc>
-                <a:spcPct val="115000"/>
+                <a:spcPct val="105000"/>
               </a:lnSpc>
               <a:buNone/>
             </a:pPr>
             <a:r>
-              <a:rPr lang="en-US" sz="1250" dirty="0">
+              <a:rPr lang="en-US" sz="1150" dirty="0">
                 <a:solidFill>
                   <a:srgbClr val="44536B"/>
                 </a:solidFill>
@@ -48999,9 +48565,510 @@
                 <a:ea typeface="Calibri" pitchFamily="34" charset="-122"/>
                 <a:cs typeface="Calibri" pitchFamily="34" charset="-120"/>
               </a:rPr>
-              <a:t>per the syllabus, a participant without proper PPE during machine use will be asked to leave the class for that session.</a:t>
-            </a:r>
-            <a:endParaRPr lang="en-US" sz="1250" dirty="0"/>
+              <a:t>features on one face are cheaper than features needing re-fixturing</a:t>
+            </a:r>
+            <a:endParaRPr lang="en-US" sz="1150" dirty="0"/>
+          </a:p>
+        </p:txBody>
+      </p:sp>
+      <p:sp>
+        <p:nvSpPr>
+          <p:cNvPr id="17" name="Shape 15"/>
+          <p:cNvSpPr/>
+          <p:nvPr/>
+        </p:nvSpPr>
+        <p:spPr>
+          <a:xfrm>
+            <a:off x="8141208" y="2057400"/>
+            <a:ext cx="3563112" cy="1911096"/>
+          </a:xfrm>
+          <a:prstGeom prst="roundRect">
+            <a:avLst>
+              <a:gd name="adj" fmla="val 3828"/>
+            </a:avLst>
+          </a:prstGeom>
+          <a:solidFill>
+            <a:srgbClr val="F3F6F9"/>
+          </a:solidFill>
+          <a:ln w="12700">
+            <a:solidFill>
+              <a:srgbClr val="E1E7EE"/>
+            </a:solidFill>
+            <a:prstDash val="solid"/>
+          </a:ln>
+        </p:spPr>
+      </p:sp>
+      <p:sp>
+        <p:nvSpPr>
+          <p:cNvPr id="18" name="Shape 16"/>
+          <p:cNvSpPr/>
+          <p:nvPr/>
+        </p:nvSpPr>
+        <p:spPr>
+          <a:xfrm>
+            <a:off x="8305800" y="2203704"/>
+            <a:ext cx="384048" cy="384048"/>
+          </a:xfrm>
+          <a:prstGeom prst="ellipse">
+            <a:avLst/>
+          </a:prstGeom>
+          <a:solidFill>
+            <a:srgbClr val="D97706"/>
+          </a:solidFill>
+          <a:ln/>
+        </p:spPr>
+      </p:sp>
+      <p:sp>
+        <p:nvSpPr>
+          <p:cNvPr id="19" name="Text 17"/>
+          <p:cNvSpPr txBox="1"/>
+          <p:nvPr/>
+        </p:nvSpPr>
+        <p:spPr>
+          <a:xfrm>
+            <a:off x="8305800" y="2203704"/>
+            <a:ext cx="384048" cy="384048"/>
+          </a:xfrm>
+          <a:prstGeom prst="rect">
+            <a:avLst/>
+          </a:prstGeom>
+          <a:noFill/>
+          <a:ln/>
+        </p:spPr>
+        <p:txBody>
+          <a:bodyPr wrap="square" lIns="0" tIns="0" rIns="0" bIns="0" rtlCol="0" anchor="ctr"/>
+          <a:lstStyle/>
+          <a:p>
+            <a:pPr algn="ctr" indent="0" marL="0">
+              <a:buNone/>
+            </a:pPr>
+            <a:r>
+              <a:rPr lang="en-US" sz="1500" b="1" dirty="0">
+                <a:solidFill>
+                  <a:srgbClr val="FFFFFF"/>
+                </a:solidFill>
+                <a:latin typeface="Calibri" pitchFamily="34" charset="0"/>
+                <a:ea typeface="Calibri" pitchFamily="34" charset="-122"/>
+                <a:cs typeface="Calibri" pitchFamily="34" charset="-120"/>
+              </a:rPr>
+              <a:t>3</a:t>
+            </a:r>
+            <a:endParaRPr lang="en-US" sz="1500" dirty="0"/>
+          </a:p>
+        </p:txBody>
+      </p:sp>
+      <p:sp>
+        <p:nvSpPr>
+          <p:cNvPr id="20" name="Text 18"/>
+          <p:cNvSpPr txBox="1"/>
+          <p:nvPr/>
+        </p:nvSpPr>
+        <p:spPr>
+          <a:xfrm>
+            <a:off x="8799576" y="2167128"/>
+            <a:ext cx="2740152" cy="457200"/>
+          </a:xfrm>
+          <a:prstGeom prst="rect">
+            <a:avLst/>
+          </a:prstGeom>
+          <a:noFill/>
+          <a:ln/>
+        </p:spPr>
+        <p:txBody>
+          <a:bodyPr wrap="square" lIns="0" tIns="0" rIns="0" bIns="0" rtlCol="0" anchor="t"/>
+          <a:lstStyle/>
+          <a:p>
+            <a:pPr indent="0" marL="0">
+              <a:buNone/>
+            </a:pPr>
+            <a:r>
+              <a:rPr lang="en-US" sz="1300" b="1" dirty="0">
+                <a:solidFill>
+                  <a:srgbClr val="0F2942"/>
+                </a:solidFill>
+                <a:latin typeface="Calibri" pitchFamily="34" charset="0"/>
+                <a:ea typeface="Calibri" pitchFamily="34" charset="-122"/>
+                <a:cs typeface="Calibri" pitchFamily="34" charset="-120"/>
+              </a:rPr>
+              <a:t>Tolerance only what matters</a:t>
+            </a:r>
+            <a:endParaRPr lang="en-US" sz="1300" dirty="0"/>
+          </a:p>
+        </p:txBody>
+      </p:sp>
+      <p:sp>
+        <p:nvSpPr>
+          <p:cNvPr id="21" name="Text 19"/>
+          <p:cNvSpPr txBox="1"/>
+          <p:nvPr/>
+        </p:nvSpPr>
+        <p:spPr>
+          <a:xfrm>
+            <a:off x="8305800" y="2624328"/>
+            <a:ext cx="3233928" cy="1252728"/>
+          </a:xfrm>
+          <a:prstGeom prst="rect">
+            <a:avLst/>
+          </a:prstGeom>
+          <a:noFill/>
+          <a:ln/>
+        </p:spPr>
+        <p:txBody>
+          <a:bodyPr wrap="square" lIns="0" tIns="0" rIns="0" bIns="0" rtlCol="0" anchor="t"/>
+          <a:lstStyle/>
+          <a:p>
+            <a:pPr indent="0" marL="0">
+              <a:lnSpc>
+                <a:spcPct val="105000"/>
+              </a:lnSpc>
+              <a:buNone/>
+            </a:pPr>
+            <a:r>
+              <a:rPr lang="en-US" sz="1150" dirty="0">
+                <a:solidFill>
+                  <a:srgbClr val="44536B"/>
+                </a:solidFill>
+                <a:latin typeface="Calibri" pitchFamily="34" charset="0"/>
+                <a:ea typeface="Calibri" pitchFamily="34" charset="-122"/>
+                <a:cs typeface="Calibri" pitchFamily="34" charset="-120"/>
+              </a:rPr>
+              <a:t>tight tolerances drive cost — apply to mating/functional features</a:t>
+            </a:r>
+            <a:endParaRPr lang="en-US" sz="1150" dirty="0"/>
+          </a:p>
+        </p:txBody>
+      </p:sp>
+      <p:sp>
+        <p:nvSpPr>
+          <p:cNvPr id="22" name="Shape 20"/>
+          <p:cNvSpPr/>
+          <p:nvPr/>
+        </p:nvSpPr>
+        <p:spPr>
+          <a:xfrm>
+            <a:off x="502920" y="4169664"/>
+            <a:ext cx="3563112" cy="1911096"/>
+          </a:xfrm>
+          <a:prstGeom prst="roundRect">
+            <a:avLst>
+              <a:gd name="adj" fmla="val 3828"/>
+            </a:avLst>
+          </a:prstGeom>
+          <a:solidFill>
+            <a:srgbClr val="F3F6F9"/>
+          </a:solidFill>
+          <a:ln w="12700">
+            <a:solidFill>
+              <a:srgbClr val="E1E7EE"/>
+            </a:solidFill>
+            <a:prstDash val="solid"/>
+          </a:ln>
+        </p:spPr>
+      </p:sp>
+      <p:sp>
+        <p:nvSpPr>
+          <p:cNvPr id="23" name="Shape 21"/>
+          <p:cNvSpPr/>
+          <p:nvPr/>
+        </p:nvSpPr>
+        <p:spPr>
+          <a:xfrm>
+            <a:off x="667512" y="4315968"/>
+            <a:ext cx="384048" cy="384048"/>
+          </a:xfrm>
+          <a:prstGeom prst="ellipse">
+            <a:avLst/>
+          </a:prstGeom>
+          <a:solidFill>
+            <a:srgbClr val="D97706"/>
+          </a:solidFill>
+          <a:ln/>
+        </p:spPr>
+      </p:sp>
+      <p:sp>
+        <p:nvSpPr>
+          <p:cNvPr id="24" name="Text 22"/>
+          <p:cNvSpPr txBox="1"/>
+          <p:nvPr/>
+        </p:nvSpPr>
+        <p:spPr>
+          <a:xfrm>
+            <a:off x="667512" y="4315968"/>
+            <a:ext cx="384048" cy="384048"/>
+          </a:xfrm>
+          <a:prstGeom prst="rect">
+            <a:avLst/>
+          </a:prstGeom>
+          <a:noFill/>
+          <a:ln/>
+        </p:spPr>
+        <p:txBody>
+          <a:bodyPr wrap="square" lIns="0" tIns="0" rIns="0" bIns="0" rtlCol="0" anchor="ctr"/>
+          <a:lstStyle/>
+          <a:p>
+            <a:pPr algn="ctr" indent="0" marL="0">
+              <a:buNone/>
+            </a:pPr>
+            <a:r>
+              <a:rPr lang="en-US" sz="1500" b="1" dirty="0">
+                <a:solidFill>
+                  <a:srgbClr val="FFFFFF"/>
+                </a:solidFill>
+                <a:latin typeface="Calibri" pitchFamily="34" charset="0"/>
+                <a:ea typeface="Calibri" pitchFamily="34" charset="-122"/>
+                <a:cs typeface="Calibri" pitchFamily="34" charset="-120"/>
+              </a:rPr>
+              <a:t>4</a:t>
+            </a:r>
+            <a:endParaRPr lang="en-US" sz="1500" dirty="0"/>
+          </a:p>
+        </p:txBody>
+      </p:sp>
+      <p:sp>
+        <p:nvSpPr>
+          <p:cNvPr id="25" name="Text 23"/>
+          <p:cNvSpPr txBox="1"/>
+          <p:nvPr/>
+        </p:nvSpPr>
+        <p:spPr>
+          <a:xfrm>
+            <a:off x="1161288" y="4279392"/>
+            <a:ext cx="2740152" cy="457200"/>
+          </a:xfrm>
+          <a:prstGeom prst="rect">
+            <a:avLst/>
+          </a:prstGeom>
+          <a:noFill/>
+          <a:ln/>
+        </p:spPr>
+        <p:txBody>
+          <a:bodyPr wrap="square" lIns="0" tIns="0" rIns="0" bIns="0" rtlCol="0" anchor="t"/>
+          <a:lstStyle/>
+          <a:p>
+            <a:pPr indent="0" marL="0">
+              <a:buNone/>
+            </a:pPr>
+            <a:r>
+              <a:rPr lang="en-US" sz="1300" b="1" dirty="0">
+                <a:solidFill>
+                  <a:srgbClr val="0F2942"/>
+                </a:solidFill>
+                <a:latin typeface="Calibri" pitchFamily="34" charset="0"/>
+                <a:ea typeface="Calibri" pitchFamily="34" charset="-122"/>
+                <a:cs typeface="Calibri" pitchFamily="34" charset="-120"/>
+              </a:rPr>
+              <a:t>Use standard stock &amp; tooling</a:t>
+            </a:r>
+            <a:endParaRPr lang="en-US" sz="1300" dirty="0"/>
+          </a:p>
+        </p:txBody>
+      </p:sp>
+      <p:sp>
+        <p:nvSpPr>
+          <p:cNvPr id="26" name="Text 24"/>
+          <p:cNvSpPr txBox="1"/>
+          <p:nvPr/>
+        </p:nvSpPr>
+        <p:spPr>
+          <a:xfrm>
+            <a:off x="667512" y="4736592"/>
+            <a:ext cx="3233928" cy="1252728"/>
+          </a:xfrm>
+          <a:prstGeom prst="rect">
+            <a:avLst/>
+          </a:prstGeom>
+          <a:noFill/>
+          <a:ln/>
+        </p:spPr>
+        <p:txBody>
+          <a:bodyPr wrap="square" lIns="0" tIns="0" rIns="0" bIns="0" rtlCol="0" anchor="t"/>
+          <a:lstStyle/>
+          <a:p>
+            <a:pPr indent="0" marL="0">
+              <a:lnSpc>
+                <a:spcPct val="105000"/>
+              </a:lnSpc>
+              <a:buNone/>
+            </a:pPr>
+            <a:r>
+              <a:rPr lang="en-US" sz="1150" dirty="0">
+                <a:solidFill>
+                  <a:srgbClr val="44536B"/>
+                </a:solidFill>
+                <a:latin typeface="Calibri" pitchFamily="34" charset="0"/>
+                <a:ea typeface="Calibri" pitchFamily="34" charset="-122"/>
+                <a:cs typeface="Calibri" pitchFamily="34" charset="-120"/>
+              </a:rPr>
+              <a:t>standard sizes and drill/tool radii cost less, arrive faster</a:t>
+            </a:r>
+            <a:endParaRPr lang="en-US" sz="1150" dirty="0"/>
+          </a:p>
+        </p:txBody>
+      </p:sp>
+      <p:sp>
+        <p:nvSpPr>
+          <p:cNvPr id="27" name="Shape 25"/>
+          <p:cNvSpPr/>
+          <p:nvPr/>
+        </p:nvSpPr>
+        <p:spPr>
+          <a:xfrm>
+            <a:off x="4322064" y="4169664"/>
+            <a:ext cx="3563112" cy="1911096"/>
+          </a:xfrm>
+          <a:prstGeom prst="roundRect">
+            <a:avLst>
+              <a:gd name="adj" fmla="val 3828"/>
+            </a:avLst>
+          </a:prstGeom>
+          <a:solidFill>
+            <a:srgbClr val="F3F6F9"/>
+          </a:solidFill>
+          <a:ln w="12700">
+            <a:solidFill>
+              <a:srgbClr val="E1E7EE"/>
+            </a:solidFill>
+            <a:prstDash val="solid"/>
+          </a:ln>
+        </p:spPr>
+      </p:sp>
+      <p:sp>
+        <p:nvSpPr>
+          <p:cNvPr id="28" name="Shape 26"/>
+          <p:cNvSpPr/>
+          <p:nvPr/>
+        </p:nvSpPr>
+        <p:spPr>
+          <a:xfrm>
+            <a:off x="4486656" y="4315968"/>
+            <a:ext cx="384048" cy="384048"/>
+          </a:xfrm>
+          <a:prstGeom prst="ellipse">
+            <a:avLst/>
+          </a:prstGeom>
+          <a:solidFill>
+            <a:srgbClr val="D97706"/>
+          </a:solidFill>
+          <a:ln/>
+        </p:spPr>
+      </p:sp>
+      <p:sp>
+        <p:nvSpPr>
+          <p:cNvPr id="29" name="Text 27"/>
+          <p:cNvSpPr txBox="1"/>
+          <p:nvPr/>
+        </p:nvSpPr>
+        <p:spPr>
+          <a:xfrm>
+            <a:off x="4486656" y="4315968"/>
+            <a:ext cx="384048" cy="384048"/>
+          </a:xfrm>
+          <a:prstGeom prst="rect">
+            <a:avLst/>
+          </a:prstGeom>
+          <a:noFill/>
+          <a:ln/>
+        </p:spPr>
+        <p:txBody>
+          <a:bodyPr wrap="square" lIns="0" tIns="0" rIns="0" bIns="0" rtlCol="0" anchor="ctr"/>
+          <a:lstStyle/>
+          <a:p>
+            <a:pPr algn="ctr" indent="0" marL="0">
+              <a:buNone/>
+            </a:pPr>
+            <a:r>
+              <a:rPr lang="en-US" sz="1500" b="1" dirty="0">
+                <a:solidFill>
+                  <a:srgbClr val="FFFFFF"/>
+                </a:solidFill>
+                <a:latin typeface="Calibri" pitchFamily="34" charset="0"/>
+                <a:ea typeface="Calibri" pitchFamily="34" charset="-122"/>
+                <a:cs typeface="Calibri" pitchFamily="34" charset="-120"/>
+              </a:rPr>
+              <a:t>5</a:t>
+            </a:r>
+            <a:endParaRPr lang="en-US" sz="1500" dirty="0"/>
+          </a:p>
+        </p:txBody>
+      </p:sp>
+      <p:sp>
+        <p:nvSpPr>
+          <p:cNvPr id="30" name="Text 28"/>
+          <p:cNvSpPr txBox="1"/>
+          <p:nvPr/>
+        </p:nvSpPr>
+        <p:spPr>
+          <a:xfrm>
+            <a:off x="4980432" y="4279392"/>
+            <a:ext cx="2740152" cy="457200"/>
+          </a:xfrm>
+          <a:prstGeom prst="rect">
+            <a:avLst/>
+          </a:prstGeom>
+          <a:noFill/>
+          <a:ln/>
+        </p:spPr>
+        <p:txBody>
+          <a:bodyPr wrap="square" lIns="0" tIns="0" rIns="0" bIns="0" rtlCol="0" anchor="t"/>
+          <a:lstStyle/>
+          <a:p>
+            <a:pPr indent="0" marL="0">
+              <a:buNone/>
+            </a:pPr>
+            <a:r>
+              <a:rPr lang="en-US" sz="1300" b="1" dirty="0">
+                <a:solidFill>
+                  <a:srgbClr val="0F2942"/>
+                </a:solidFill>
+                <a:latin typeface="Calibri" pitchFamily="34" charset="0"/>
+                <a:ea typeface="Calibri" pitchFamily="34" charset="-122"/>
+                <a:cs typeface="Calibri" pitchFamily="34" charset="-120"/>
+              </a:rPr>
+              <a:t>Design for prototype AND product</a:t>
+            </a:r>
+            <a:endParaRPr lang="en-US" sz="1300" dirty="0"/>
+          </a:p>
+        </p:txBody>
+      </p:sp>
+      <p:sp>
+        <p:nvSpPr>
+          <p:cNvPr id="31" name="Text 29"/>
+          <p:cNvSpPr txBox="1"/>
+          <p:nvPr/>
+        </p:nvSpPr>
+        <p:spPr>
+          <a:xfrm>
+            <a:off x="4486656" y="4736592"/>
+            <a:ext cx="3233928" cy="1252728"/>
+          </a:xfrm>
+          <a:prstGeom prst="rect">
+            <a:avLst/>
+          </a:prstGeom>
+          <a:noFill/>
+          <a:ln/>
+        </p:spPr>
+        <p:txBody>
+          <a:bodyPr wrap="square" lIns="0" tIns="0" rIns="0" bIns="0" rtlCol="0" anchor="t"/>
+          <a:lstStyle/>
+          <a:p>
+            <a:pPr indent="0" marL="0">
+              <a:lnSpc>
+                <a:spcPct val="105000"/>
+              </a:lnSpc>
+              <a:buNone/>
+            </a:pPr>
+            <a:r>
+              <a:rPr lang="en-US" sz="1150" dirty="0">
+                <a:solidFill>
+                  <a:srgbClr val="44536B"/>
+                </a:solidFill>
+                <a:latin typeface="Calibri" pitchFamily="34" charset="0"/>
+                <a:ea typeface="Calibri" pitchFamily="34" charset="-122"/>
+                <a:cs typeface="Calibri" pitchFamily="34" charset="-120"/>
+              </a:rPr>
+              <a:t>what's fine for a one-off print may not survive production</a:t>
+            </a:r>
+            <a:endParaRPr lang="en-US" sz="1150" dirty="0"/>
           </a:p>
         </p:txBody>
       </p:sp>
